--- a/docs/pptx/carbo/ritu-carbo-linsubhr-ratio-hosp10.pptx
+++ b/docs/pptx/carbo/ritu-carbo-linsubhr-ratio-hosp10.pptx
@@ -2443,7 +2443,7 @@
           </p:nvSpPr>
           <p:spPr>
             <a:xfrm>
-              <a:off x="1427870" y="2073503"/>
+              <a:off x="1428538" y="2073503"/>
               <a:ext cx="0" cy="3649639"/>
             </a:xfrm>
             <a:custGeom>
@@ -2486,7 +2486,7 @@
           </p:nvSpPr>
           <p:spPr>
             <a:xfrm>
-              <a:off x="3243537" y="2073503"/>
+              <a:off x="3243764" y="2073503"/>
               <a:ext cx="0" cy="3649639"/>
             </a:xfrm>
             <a:custGeom>
@@ -2529,7 +2529,7 @@
           </p:nvSpPr>
           <p:spPr>
             <a:xfrm>
-              <a:off x="5059204" y="2073503"/>
+              <a:off x="5058989" y="2073503"/>
               <a:ext cx="0" cy="3649639"/>
             </a:xfrm>
             <a:custGeom>
@@ -2572,7 +2572,7 @@
           </p:nvSpPr>
           <p:spPr>
             <a:xfrm>
-              <a:off x="6874870" y="2073503"/>
+              <a:off x="6874214" y="2073503"/>
               <a:ext cx="0" cy="3649639"/>
             </a:xfrm>
             <a:custGeom>
@@ -2830,7 +2830,7 @@
           </p:nvSpPr>
           <p:spPr>
             <a:xfrm>
-              <a:off x="2335703" y="2073503"/>
+              <a:off x="2336151" y="2073503"/>
               <a:ext cx="0" cy="3649639"/>
             </a:xfrm>
             <a:custGeom>
@@ -2873,7 +2873,7 @@
           </p:nvSpPr>
           <p:spPr>
             <a:xfrm>
-              <a:off x="4151370" y="2073503"/>
+              <a:off x="4151376" y="2073503"/>
               <a:ext cx="0" cy="3649639"/>
             </a:xfrm>
             <a:custGeom>
@@ -2916,7 +2916,7 @@
           </p:nvSpPr>
           <p:spPr>
             <a:xfrm>
-              <a:off x="5967037" y="2073503"/>
+              <a:off x="5966601" y="2073503"/>
               <a:ext cx="0" cy="3649639"/>
             </a:xfrm>
             <a:custGeom>
@@ -2959,7 +2959,7 @@
           </p:nvSpPr>
           <p:spPr>
             <a:xfrm>
-              <a:off x="7782704" y="2073503"/>
+              <a:off x="7781826" y="2073503"/>
               <a:ext cx="0" cy="3649639"/>
             </a:xfrm>
             <a:custGeom>
@@ -3003,569 +3003,569 @@
           <p:spPr>
             <a:xfrm>
               <a:off x="1172049" y="2073503"/>
-              <a:ext cx="7090630" cy="3375534"/>
+              <a:ext cx="7090630" cy="3374241"/>
             </a:xfrm>
             <a:custGeom>
               <a:avLst/>
               <a:pathLst>
-                <a:path w="7090630" h="3375534">
+                <a:path w="7090630" h="3374241">
                   <a:moveTo>
-                    <a:pt x="258312" y="0"/>
+                    <a:pt x="283097" y="0"/>
                   </a:moveTo>
                   <a:lnTo>
-                    <a:pt x="286490" y="50066"/>
-                  </a:lnTo>
-                  <a:lnTo>
-                    <a:pt x="358112" y="172780"/>
-                  </a:lnTo>
-                  <a:lnTo>
-                    <a:pt x="429735" y="291108"/>
-                  </a:lnTo>
-                  <a:lnTo>
-                    <a:pt x="501357" y="405208"/>
-                  </a:lnTo>
-                  <a:lnTo>
-                    <a:pt x="572980" y="515230"/>
-                  </a:lnTo>
-                  <a:lnTo>
-                    <a:pt x="644602" y="621320"/>
-                  </a:lnTo>
-                  <a:lnTo>
-                    <a:pt x="716225" y="723618"/>
-                  </a:lnTo>
-                  <a:lnTo>
-                    <a:pt x="787847" y="822260"/>
-                  </a:lnTo>
-                  <a:lnTo>
-                    <a:pt x="859470" y="917378"/>
-                  </a:lnTo>
-                  <a:lnTo>
-                    <a:pt x="931092" y="1009095"/>
-                  </a:lnTo>
-                  <a:lnTo>
-                    <a:pt x="1002715" y="1097535"/>
-                  </a:lnTo>
-                  <a:lnTo>
-                    <a:pt x="1074337" y="1182814"/>
-                  </a:lnTo>
-                  <a:lnTo>
-                    <a:pt x="1145960" y="1265046"/>
-                  </a:lnTo>
-                  <a:lnTo>
-                    <a:pt x="1217582" y="1344339"/>
-                  </a:lnTo>
-                  <a:lnTo>
-                    <a:pt x="1289205" y="1420798"/>
-                  </a:lnTo>
-                  <a:lnTo>
-                    <a:pt x="1360827" y="1494524"/>
-                  </a:lnTo>
-                  <a:lnTo>
-                    <a:pt x="1432450" y="1565615"/>
-                  </a:lnTo>
-                  <a:lnTo>
-                    <a:pt x="1504073" y="1634166"/>
-                  </a:lnTo>
-                  <a:lnTo>
-                    <a:pt x="1575695" y="1700267"/>
-                  </a:lnTo>
-                  <a:lnTo>
-                    <a:pt x="1647318" y="1764006"/>
-                  </a:lnTo>
-                  <a:lnTo>
-                    <a:pt x="1718940" y="1825466"/>
-                  </a:lnTo>
-                  <a:lnTo>
-                    <a:pt x="1790563" y="1884731"/>
-                  </a:lnTo>
-                  <a:lnTo>
-                    <a:pt x="1862185" y="1941877"/>
-                  </a:lnTo>
-                  <a:lnTo>
-                    <a:pt x="1933808" y="1996981"/>
-                  </a:lnTo>
-                  <a:lnTo>
-                    <a:pt x="2005430" y="2050115"/>
-                  </a:lnTo>
-                  <a:lnTo>
-                    <a:pt x="2077053" y="2101351"/>
-                  </a:lnTo>
-                  <a:lnTo>
-                    <a:pt x="2148675" y="2150755"/>
-                  </a:lnTo>
-                  <a:lnTo>
-                    <a:pt x="2220298" y="2198394"/>
-                  </a:lnTo>
-                  <a:lnTo>
-                    <a:pt x="2291920" y="2244331"/>
-                  </a:lnTo>
-                  <a:lnTo>
-                    <a:pt x="2363543" y="2288625"/>
-                  </a:lnTo>
-                  <a:lnTo>
-                    <a:pt x="2435165" y="2331337"/>
-                  </a:lnTo>
-                  <a:lnTo>
-                    <a:pt x="2506788" y="2372522"/>
-                  </a:lnTo>
-                  <a:lnTo>
-                    <a:pt x="2578410" y="2412235"/>
-                  </a:lnTo>
-                  <a:lnTo>
-                    <a:pt x="2650033" y="2450529"/>
-                  </a:lnTo>
-                  <a:lnTo>
-                    <a:pt x="2721655" y="2487455"/>
-                  </a:lnTo>
-                  <a:lnTo>
-                    <a:pt x="2793278" y="2523061"/>
-                  </a:lnTo>
-                  <a:lnTo>
-                    <a:pt x="2864901" y="2557394"/>
-                  </a:lnTo>
-                  <a:lnTo>
-                    <a:pt x="2936523" y="2590500"/>
-                  </a:lnTo>
-                  <a:lnTo>
-                    <a:pt x="3008146" y="2622423"/>
-                  </a:lnTo>
-                  <a:lnTo>
-                    <a:pt x="3079768" y="2653206"/>
-                  </a:lnTo>
-                  <a:lnTo>
-                    <a:pt x="3151391" y="2627229"/>
-                  </a:lnTo>
-                  <a:lnTo>
-                    <a:pt x="3223013" y="2598243"/>
-                  </a:lnTo>
-                  <a:lnTo>
-                    <a:pt x="3294636" y="2568275"/>
-                  </a:lnTo>
-                  <a:lnTo>
-                    <a:pt x="3366258" y="2537294"/>
-                  </a:lnTo>
-                  <a:lnTo>
-                    <a:pt x="3437881" y="2505263"/>
-                  </a:lnTo>
-                  <a:lnTo>
-                    <a:pt x="3509503" y="2472149"/>
-                  </a:lnTo>
-                  <a:lnTo>
-                    <a:pt x="3581126" y="2437915"/>
-                  </a:lnTo>
-                  <a:lnTo>
-                    <a:pt x="3652748" y="2402521"/>
-                  </a:lnTo>
-                  <a:lnTo>
-                    <a:pt x="3724371" y="2365930"/>
-                  </a:lnTo>
-                  <a:lnTo>
-                    <a:pt x="3795993" y="2328101"/>
-                  </a:lnTo>
-                  <a:lnTo>
-                    <a:pt x="3867616" y="2288991"/>
-                  </a:lnTo>
-                  <a:lnTo>
-                    <a:pt x="3939238" y="2248558"/>
-                  </a:lnTo>
-                  <a:lnTo>
-                    <a:pt x="4010861" y="2206756"/>
-                  </a:lnTo>
-                  <a:lnTo>
-                    <a:pt x="4082483" y="2163540"/>
-                  </a:lnTo>
-                  <a:lnTo>
-                    <a:pt x="4154106" y="2118861"/>
-                  </a:lnTo>
-                  <a:lnTo>
-                    <a:pt x="4225729" y="2072671"/>
-                  </a:lnTo>
-                  <a:lnTo>
-                    <a:pt x="4297351" y="2024917"/>
-                  </a:lnTo>
-                  <a:lnTo>
-                    <a:pt x="4368974" y="1975546"/>
-                  </a:lnTo>
-                  <a:lnTo>
-                    <a:pt x="4440596" y="1924506"/>
-                  </a:lnTo>
-                  <a:lnTo>
-                    <a:pt x="4512219" y="1871737"/>
-                  </a:lnTo>
-                  <a:lnTo>
-                    <a:pt x="4583841" y="1817183"/>
-                  </a:lnTo>
-                  <a:lnTo>
-                    <a:pt x="4655464" y="1760783"/>
-                  </a:lnTo>
-                  <a:lnTo>
-                    <a:pt x="4727086" y="1702474"/>
-                  </a:lnTo>
-                  <a:lnTo>
-                    <a:pt x="4798709" y="1642192"/>
-                  </a:lnTo>
-                  <a:lnTo>
-                    <a:pt x="4870331" y="1579869"/>
-                  </a:lnTo>
-                  <a:lnTo>
-                    <a:pt x="4941954" y="1515438"/>
-                  </a:lnTo>
-                  <a:lnTo>
-                    <a:pt x="5013576" y="1448826"/>
-                  </a:lnTo>
-                  <a:lnTo>
-                    <a:pt x="5085199" y="1379959"/>
-                  </a:lnTo>
-                  <a:lnTo>
-                    <a:pt x="5156821" y="1308763"/>
-                  </a:lnTo>
-                  <a:lnTo>
-                    <a:pt x="5228444" y="1235156"/>
-                  </a:lnTo>
-                  <a:lnTo>
-                    <a:pt x="5300066" y="1159059"/>
-                  </a:lnTo>
-                  <a:lnTo>
-                    <a:pt x="5371689" y="1080386"/>
-                  </a:lnTo>
-                  <a:lnTo>
-                    <a:pt x="5443311" y="999051"/>
-                  </a:lnTo>
-                  <a:lnTo>
-                    <a:pt x="5514934" y="914963"/>
-                  </a:lnTo>
-                  <a:lnTo>
-                    <a:pt x="5586557" y="828030"/>
-                  </a:lnTo>
-                  <a:lnTo>
-                    <a:pt x="5658179" y="738154"/>
-                  </a:lnTo>
-                  <a:lnTo>
-                    <a:pt x="5729802" y="645237"/>
-                  </a:lnTo>
-                  <a:lnTo>
-                    <a:pt x="5801424" y="549176"/>
-                  </a:lnTo>
-                  <a:lnTo>
-                    <a:pt x="5873047" y="449863"/>
-                  </a:lnTo>
-                  <a:lnTo>
-                    <a:pt x="5944669" y="347190"/>
-                  </a:lnTo>
-                  <a:lnTo>
-                    <a:pt x="6016292" y="241041"/>
-                  </a:lnTo>
-                  <a:lnTo>
-                    <a:pt x="6087914" y="131301"/>
-                  </a:lnTo>
-                  <a:lnTo>
-                    <a:pt x="6159537" y="17847"/>
-                  </a:lnTo>
-                  <a:lnTo>
-                    <a:pt x="6170435" y="0"/>
+                    <a:pt x="286490" y="6106"/>
+                  </a:lnTo>
+                  <a:lnTo>
+                    <a:pt x="358112" y="130421"/>
+                  </a:lnTo>
+                  <a:lnTo>
+                    <a:pt x="429735" y="250292"/>
+                  </a:lnTo>
+                  <a:lnTo>
+                    <a:pt x="501357" y="365878"/>
+                  </a:lnTo>
+                  <a:lnTo>
+                    <a:pt x="572980" y="477332"/>
+                  </a:lnTo>
+                  <a:lnTo>
+                    <a:pt x="644602" y="584802"/>
+                  </a:lnTo>
+                  <a:lnTo>
+                    <a:pt x="716225" y="688430"/>
+                  </a:lnTo>
+                  <a:lnTo>
+                    <a:pt x="787847" y="788354"/>
+                  </a:lnTo>
+                  <a:lnTo>
+                    <a:pt x="859470" y="884705"/>
+                  </a:lnTo>
+                  <a:lnTo>
+                    <a:pt x="931092" y="977613"/>
+                  </a:lnTo>
+                  <a:lnTo>
+                    <a:pt x="1002715" y="1067199"/>
+                  </a:lnTo>
+                  <a:lnTo>
+                    <a:pt x="1074337" y="1153583"/>
+                  </a:lnTo>
+                  <a:lnTo>
+                    <a:pt x="1145960" y="1236879"/>
+                  </a:lnTo>
+                  <a:lnTo>
+                    <a:pt x="1217582" y="1317198"/>
+                  </a:lnTo>
+                  <a:lnTo>
+                    <a:pt x="1289205" y="1394645"/>
+                  </a:lnTo>
+                  <a:lnTo>
+                    <a:pt x="1360827" y="1469324"/>
+                  </a:lnTo>
+                  <a:lnTo>
+                    <a:pt x="1432450" y="1541333"/>
+                  </a:lnTo>
+                  <a:lnTo>
+                    <a:pt x="1504073" y="1610769"/>
+                  </a:lnTo>
+                  <a:lnTo>
+                    <a:pt x="1575695" y="1677722"/>
+                  </a:lnTo>
+                  <a:lnTo>
+                    <a:pt x="1647318" y="1742281"/>
+                  </a:lnTo>
+                  <a:lnTo>
+                    <a:pt x="1718940" y="1804533"/>
+                  </a:lnTo>
+                  <a:lnTo>
+                    <a:pt x="1790563" y="1864560"/>
+                  </a:lnTo>
+                  <a:lnTo>
+                    <a:pt x="1862185" y="1922441"/>
+                  </a:lnTo>
+                  <a:lnTo>
+                    <a:pt x="1933808" y="1978253"/>
+                  </a:lnTo>
+                  <a:lnTo>
+                    <a:pt x="2005430" y="2032069"/>
+                  </a:lnTo>
+                  <a:lnTo>
+                    <a:pt x="2077053" y="2083962"/>
+                  </a:lnTo>
+                  <a:lnTo>
+                    <a:pt x="2148675" y="2134000"/>
+                  </a:lnTo>
+                  <a:lnTo>
+                    <a:pt x="2220298" y="2182249"/>
+                  </a:lnTo>
+                  <a:lnTo>
+                    <a:pt x="2291920" y="2228774"/>
+                  </a:lnTo>
+                  <a:lnTo>
+                    <a:pt x="2363543" y="2273635"/>
+                  </a:lnTo>
+                  <a:lnTo>
+                    <a:pt x="2435165" y="2316893"/>
+                  </a:lnTo>
+                  <a:lnTo>
+                    <a:pt x="2506788" y="2358604"/>
+                  </a:lnTo>
+                  <a:lnTo>
+                    <a:pt x="2578410" y="2398824"/>
+                  </a:lnTo>
+                  <a:lnTo>
+                    <a:pt x="2650033" y="2437607"/>
+                  </a:lnTo>
+                  <a:lnTo>
+                    <a:pt x="2721655" y="2475003"/>
+                  </a:lnTo>
+                  <a:lnTo>
+                    <a:pt x="2793278" y="2511063"/>
+                  </a:lnTo>
+                  <a:lnTo>
+                    <a:pt x="2864901" y="2545833"/>
+                  </a:lnTo>
+                  <a:lnTo>
+                    <a:pt x="2936523" y="2579361"/>
+                  </a:lnTo>
+                  <a:lnTo>
+                    <a:pt x="3008146" y="2611690"/>
+                  </a:lnTo>
+                  <a:lnTo>
+                    <a:pt x="3079768" y="2642863"/>
+                  </a:lnTo>
+                  <a:lnTo>
+                    <a:pt x="3151391" y="2636862"/>
+                  </a:lnTo>
+                  <a:lnTo>
+                    <a:pt x="3223013" y="2608195"/>
+                  </a:lnTo>
+                  <a:lnTo>
+                    <a:pt x="3294636" y="2578557"/>
+                  </a:lnTo>
+                  <a:lnTo>
+                    <a:pt x="3366258" y="2547915"/>
+                  </a:lnTo>
+                  <a:lnTo>
+                    <a:pt x="3437881" y="2516237"/>
+                  </a:lnTo>
+                  <a:lnTo>
+                    <a:pt x="3509503" y="2483486"/>
+                  </a:lnTo>
+                  <a:lnTo>
+                    <a:pt x="3581126" y="2449627"/>
+                  </a:lnTo>
+                  <a:lnTo>
+                    <a:pt x="3652748" y="2414621"/>
+                  </a:lnTo>
+                  <a:lnTo>
+                    <a:pt x="3724371" y="2378430"/>
+                  </a:lnTo>
+                  <a:lnTo>
+                    <a:pt x="3795993" y="2341015"/>
+                  </a:lnTo>
+                  <a:lnTo>
+                    <a:pt x="3867616" y="2302333"/>
+                  </a:lnTo>
+                  <a:lnTo>
+                    <a:pt x="3939238" y="2262341"/>
+                  </a:lnTo>
+                  <a:lnTo>
+                    <a:pt x="4010861" y="2220996"/>
+                  </a:lnTo>
+                  <a:lnTo>
+                    <a:pt x="4082483" y="2178251"/>
+                  </a:lnTo>
+                  <a:lnTo>
+                    <a:pt x="4154106" y="2134059"/>
+                  </a:lnTo>
+                  <a:lnTo>
+                    <a:pt x="4225729" y="2088371"/>
+                  </a:lnTo>
+                  <a:lnTo>
+                    <a:pt x="4297351" y="2041137"/>
+                  </a:lnTo>
+                  <a:lnTo>
+                    <a:pt x="4368974" y="1992303"/>
+                  </a:lnTo>
+                  <a:lnTo>
+                    <a:pt x="4440596" y="1941817"/>
+                  </a:lnTo>
+                  <a:lnTo>
+                    <a:pt x="4512219" y="1889622"/>
+                  </a:lnTo>
+                  <a:lnTo>
+                    <a:pt x="4583841" y="1835660"/>
+                  </a:lnTo>
+                  <a:lnTo>
+                    <a:pt x="4655464" y="1779871"/>
+                  </a:lnTo>
+                  <a:lnTo>
+                    <a:pt x="4727086" y="1722194"/>
+                  </a:lnTo>
+                  <a:lnTo>
+                    <a:pt x="4798709" y="1662564"/>
+                  </a:lnTo>
+                  <a:lnTo>
+                    <a:pt x="4870331" y="1600916"/>
+                  </a:lnTo>
+                  <a:lnTo>
+                    <a:pt x="4941954" y="1537181"/>
+                  </a:lnTo>
+                  <a:lnTo>
+                    <a:pt x="5013576" y="1471288"/>
+                  </a:lnTo>
+                  <a:lnTo>
+                    <a:pt x="5085199" y="1403165"/>
+                  </a:lnTo>
+                  <a:lnTo>
+                    <a:pt x="5156821" y="1332736"/>
+                  </a:lnTo>
+                  <a:lnTo>
+                    <a:pt x="5228444" y="1259923"/>
+                  </a:lnTo>
+                  <a:lnTo>
+                    <a:pt x="5300066" y="1184646"/>
+                  </a:lnTo>
+                  <a:lnTo>
+                    <a:pt x="5371689" y="1106820"/>
+                  </a:lnTo>
+                  <a:lnTo>
+                    <a:pt x="5443311" y="1026359"/>
+                  </a:lnTo>
+                  <a:lnTo>
+                    <a:pt x="5514934" y="943175"/>
+                  </a:lnTo>
+                  <a:lnTo>
+                    <a:pt x="5586557" y="857175"/>
+                  </a:lnTo>
+                  <a:lnTo>
+                    <a:pt x="5658179" y="768264"/>
+                  </a:lnTo>
+                  <a:lnTo>
+                    <a:pt x="5729802" y="676343"/>
+                  </a:lnTo>
+                  <a:lnTo>
+                    <a:pt x="5801424" y="581311"/>
+                  </a:lnTo>
+                  <a:lnTo>
+                    <a:pt x="5873047" y="483062"/>
+                  </a:lnTo>
+                  <a:lnTo>
+                    <a:pt x="5944669" y="381486"/>
+                  </a:lnTo>
+                  <a:lnTo>
+                    <a:pt x="6016292" y="276473"/>
+                  </a:lnTo>
+                  <a:lnTo>
+                    <a:pt x="6087914" y="167905"/>
+                  </a:lnTo>
+                  <a:lnTo>
+                    <a:pt x="6159537" y="55661"/>
+                  </a:lnTo>
+                  <a:lnTo>
+                    <a:pt x="6193892" y="0"/>
                   </a:lnTo>
                   <a:lnTo>
                     <a:pt x="7090630" y="0"/>
                   </a:lnTo>
                   <a:lnTo>
-                    <a:pt x="7090630" y="3375534"/>
-                  </a:lnTo>
-                  <a:lnTo>
-                    <a:pt x="7019007" y="3371524"/>
-                  </a:lnTo>
-                  <a:lnTo>
-                    <a:pt x="6947385" y="3367364"/>
-                  </a:lnTo>
-                  <a:lnTo>
-                    <a:pt x="6875762" y="3363051"/>
-                  </a:lnTo>
-                  <a:lnTo>
-                    <a:pt x="6804139" y="3358578"/>
-                  </a:lnTo>
-                  <a:lnTo>
-                    <a:pt x="6732517" y="3353939"/>
-                  </a:lnTo>
-                  <a:lnTo>
-                    <a:pt x="6660894" y="3349128"/>
-                  </a:lnTo>
-                  <a:lnTo>
-                    <a:pt x="6589272" y="3344138"/>
-                  </a:lnTo>
-                  <a:lnTo>
-                    <a:pt x="6517649" y="3338964"/>
-                  </a:lnTo>
-                  <a:lnTo>
-                    <a:pt x="6446027" y="3333598"/>
-                  </a:lnTo>
-                  <a:lnTo>
-                    <a:pt x="6374404" y="3328033"/>
-                  </a:lnTo>
-                  <a:lnTo>
-                    <a:pt x="6302782" y="3322262"/>
-                  </a:lnTo>
-                  <a:lnTo>
-                    <a:pt x="6231159" y="3316277"/>
-                  </a:lnTo>
-                  <a:lnTo>
-                    <a:pt x="6159537" y="3310070"/>
-                  </a:lnTo>
-                  <a:lnTo>
-                    <a:pt x="6087914" y="3303633"/>
-                  </a:lnTo>
-                  <a:lnTo>
-                    <a:pt x="6016292" y="3296957"/>
-                  </a:lnTo>
-                  <a:lnTo>
-                    <a:pt x="5944669" y="3290034"/>
-                  </a:lnTo>
-                  <a:lnTo>
-                    <a:pt x="5873047" y="3282855"/>
-                  </a:lnTo>
-                  <a:lnTo>
-                    <a:pt x="5801424" y="3275409"/>
-                  </a:lnTo>
-                  <a:lnTo>
-                    <a:pt x="5729802" y="3267687"/>
-                  </a:lnTo>
-                  <a:lnTo>
-                    <a:pt x="5658179" y="3259680"/>
-                  </a:lnTo>
-                  <a:lnTo>
-                    <a:pt x="5586557" y="3251375"/>
-                  </a:lnTo>
-                  <a:lnTo>
-                    <a:pt x="5514934" y="3242763"/>
-                  </a:lnTo>
-                  <a:lnTo>
-                    <a:pt x="5443311" y="3233831"/>
-                  </a:lnTo>
-                  <a:lnTo>
-                    <a:pt x="5371689" y="3224569"/>
-                  </a:lnTo>
-                  <a:lnTo>
-                    <a:pt x="5300066" y="3214963"/>
-                  </a:lnTo>
-                  <a:lnTo>
-                    <a:pt x="5228444" y="3205001"/>
-                  </a:lnTo>
-                  <a:lnTo>
-                    <a:pt x="5156821" y="3194670"/>
-                  </a:lnTo>
-                  <a:lnTo>
-                    <a:pt x="5085199" y="3183956"/>
-                  </a:lnTo>
-                  <a:lnTo>
-                    <a:pt x="5013576" y="3172845"/>
-                  </a:lnTo>
-                  <a:lnTo>
-                    <a:pt x="4941954" y="3161322"/>
-                  </a:lnTo>
-                  <a:lnTo>
-                    <a:pt x="4870331" y="3149372"/>
-                  </a:lnTo>
-                  <a:lnTo>
-                    <a:pt x="4798709" y="3136979"/>
-                  </a:lnTo>
-                  <a:lnTo>
-                    <a:pt x="4727086" y="3124127"/>
-                  </a:lnTo>
-                  <a:lnTo>
-                    <a:pt x="4655464" y="3110798"/>
-                  </a:lnTo>
-                  <a:lnTo>
-                    <a:pt x="4583841" y="3096975"/>
-                  </a:lnTo>
-                  <a:lnTo>
-                    <a:pt x="4512219" y="3082641"/>
-                  </a:lnTo>
-                  <a:lnTo>
-                    <a:pt x="4440596" y="3067774"/>
-                  </a:lnTo>
-                  <a:lnTo>
-                    <a:pt x="4368974" y="3052357"/>
-                  </a:lnTo>
-                  <a:lnTo>
-                    <a:pt x="4297351" y="3036369"/>
-                  </a:lnTo>
-                  <a:lnTo>
-                    <a:pt x="4225729" y="3019788"/>
-                  </a:lnTo>
-                  <a:lnTo>
-                    <a:pt x="4154106" y="3002592"/>
-                  </a:lnTo>
-                  <a:lnTo>
-                    <a:pt x="4082483" y="2984759"/>
-                  </a:lnTo>
-                  <a:lnTo>
-                    <a:pt x="4010861" y="2966265"/>
-                  </a:lnTo>
-                  <a:lnTo>
-                    <a:pt x="3939238" y="2947086"/>
-                  </a:lnTo>
-                  <a:lnTo>
-                    <a:pt x="3867616" y="2927196"/>
-                  </a:lnTo>
-                  <a:lnTo>
-                    <a:pt x="3795993" y="2906568"/>
-                  </a:lnTo>
-                  <a:lnTo>
-                    <a:pt x="3724371" y="2885176"/>
-                  </a:lnTo>
-                  <a:lnTo>
-                    <a:pt x="3652748" y="2862992"/>
-                  </a:lnTo>
-                  <a:lnTo>
-                    <a:pt x="3581126" y="2839985"/>
-                  </a:lnTo>
-                  <a:lnTo>
-                    <a:pt x="3509503" y="2816125"/>
-                  </a:lnTo>
-                  <a:lnTo>
-                    <a:pt x="3437881" y="2791381"/>
-                  </a:lnTo>
-                  <a:lnTo>
-                    <a:pt x="3366258" y="2765720"/>
-                  </a:lnTo>
-                  <a:lnTo>
-                    <a:pt x="3294636" y="2739108"/>
-                  </a:lnTo>
-                  <a:lnTo>
-                    <a:pt x="3223013" y="2711509"/>
-                  </a:lnTo>
-                  <a:lnTo>
-                    <a:pt x="3151391" y="2682888"/>
-                  </a:lnTo>
-                  <a:lnTo>
-                    <a:pt x="3079768" y="2655267"/>
-                  </a:lnTo>
-                  <a:lnTo>
-                    <a:pt x="3008146" y="2682387"/>
-                  </a:lnTo>
-                  <a:lnTo>
-                    <a:pt x="2936523" y="2708619"/>
-                  </a:lnTo>
-                  <a:lnTo>
-                    <a:pt x="2864901" y="2733992"/>
-                  </a:lnTo>
-                  <a:lnTo>
-                    <a:pt x="2793278" y="2758535"/>
-                  </a:lnTo>
-                  <a:lnTo>
-                    <a:pt x="2721655" y="2782274"/>
-                  </a:lnTo>
-                  <a:lnTo>
-                    <a:pt x="2650033" y="2805237"/>
-                  </a:lnTo>
-                  <a:lnTo>
-                    <a:pt x="2578410" y="2827447"/>
-                  </a:lnTo>
-                  <a:lnTo>
-                    <a:pt x="2506788" y="2848931"/>
-                  </a:lnTo>
-                  <a:lnTo>
-                    <a:pt x="2435165" y="2869711"/>
-                  </a:lnTo>
-                  <a:lnTo>
-                    <a:pt x="2363543" y="2889811"/>
-                  </a:lnTo>
-                  <a:lnTo>
-                    <a:pt x="2291920" y="2909253"/>
-                  </a:lnTo>
-                  <a:lnTo>
-                    <a:pt x="2220298" y="2928059"/>
-                  </a:lnTo>
-                  <a:lnTo>
-                    <a:pt x="2148675" y="2946249"/>
-                  </a:lnTo>
-                  <a:lnTo>
-                    <a:pt x="2077053" y="2963844"/>
-                  </a:lnTo>
-                  <a:lnTo>
-                    <a:pt x="2005430" y="2980863"/>
-                  </a:lnTo>
-                  <a:lnTo>
-                    <a:pt x="1933808" y="2997324"/>
-                  </a:lnTo>
-                  <a:lnTo>
-                    <a:pt x="1862185" y="3013247"/>
-                  </a:lnTo>
-                  <a:lnTo>
-                    <a:pt x="1790563" y="3028649"/>
-                  </a:lnTo>
-                  <a:lnTo>
-                    <a:pt x="1718940" y="3043546"/>
-                  </a:lnTo>
-                  <a:lnTo>
-                    <a:pt x="1647318" y="3057956"/>
-                  </a:lnTo>
-                  <a:lnTo>
-                    <a:pt x="1575695" y="3071894"/>
-                  </a:lnTo>
-                  <a:lnTo>
-                    <a:pt x="1504073" y="3085376"/>
-                  </a:lnTo>
-                  <a:lnTo>
-                    <a:pt x="1432450" y="3098416"/>
-                  </a:lnTo>
-                  <a:lnTo>
-                    <a:pt x="1360827" y="3111030"/>
-                  </a:lnTo>
-                  <a:lnTo>
-                    <a:pt x="1289205" y="3123230"/>
-                  </a:lnTo>
-                  <a:lnTo>
-                    <a:pt x="1217582" y="3135032"/>
-                  </a:lnTo>
-                  <a:lnTo>
-                    <a:pt x="1145960" y="3146447"/>
-                  </a:lnTo>
-                  <a:lnTo>
-                    <a:pt x="1074337" y="3157488"/>
-                  </a:lnTo>
-                  <a:lnTo>
-                    <a:pt x="1002715" y="3168168"/>
-                  </a:lnTo>
-                  <a:lnTo>
-                    <a:pt x="931092" y="3178498"/>
-                  </a:lnTo>
-                  <a:lnTo>
-                    <a:pt x="859470" y="3188490"/>
-                  </a:lnTo>
-                  <a:lnTo>
-                    <a:pt x="787847" y="3198155"/>
-                  </a:lnTo>
-                  <a:lnTo>
-                    <a:pt x="716225" y="3207504"/>
-                  </a:lnTo>
-                  <a:lnTo>
-                    <a:pt x="644602" y="3216547"/>
-                  </a:lnTo>
-                  <a:lnTo>
-                    <a:pt x="572980" y="3225293"/>
-                  </a:lnTo>
-                  <a:lnTo>
-                    <a:pt x="501357" y="3233754"/>
-                  </a:lnTo>
-                  <a:lnTo>
-                    <a:pt x="429735" y="3241937"/>
-                  </a:lnTo>
-                  <a:lnTo>
-                    <a:pt x="358112" y="3249852"/>
-                  </a:lnTo>
-                  <a:lnTo>
-                    <a:pt x="286490" y="3257509"/>
-                  </a:lnTo>
-                  <a:lnTo>
-                    <a:pt x="214867" y="3264915"/>
-                  </a:lnTo>
-                  <a:lnTo>
-                    <a:pt x="143245" y="3272078"/>
-                  </a:lnTo>
-                  <a:lnTo>
-                    <a:pt x="71622" y="3279007"/>
-                  </a:lnTo>
-                  <a:lnTo>
-                    <a:pt x="0" y="3285709"/>
+                    <a:pt x="7090630" y="3374241"/>
+                  </a:lnTo>
+                  <a:lnTo>
+                    <a:pt x="7019007" y="3370182"/>
+                  </a:lnTo>
+                  <a:lnTo>
+                    <a:pt x="6947385" y="3365971"/>
+                  </a:lnTo>
+                  <a:lnTo>
+                    <a:pt x="6875762" y="3361605"/>
+                  </a:lnTo>
+                  <a:lnTo>
+                    <a:pt x="6804139" y="3357077"/>
+                  </a:lnTo>
+                  <a:lnTo>
+                    <a:pt x="6732517" y="3352381"/>
+                  </a:lnTo>
+                  <a:lnTo>
+                    <a:pt x="6660894" y="3347511"/>
+                  </a:lnTo>
+                  <a:lnTo>
+                    <a:pt x="6589272" y="3342461"/>
+                  </a:lnTo>
+                  <a:lnTo>
+                    <a:pt x="6517649" y="3337223"/>
+                  </a:lnTo>
+                  <a:lnTo>
+                    <a:pt x="6446027" y="3331791"/>
+                  </a:lnTo>
+                  <a:lnTo>
+                    <a:pt x="6374404" y="3326158"/>
+                  </a:lnTo>
+                  <a:lnTo>
+                    <a:pt x="6302782" y="3320316"/>
+                  </a:lnTo>
+                  <a:lnTo>
+                    <a:pt x="6231159" y="3314257"/>
+                  </a:lnTo>
+                  <a:lnTo>
+                    <a:pt x="6159537" y="3307974"/>
+                  </a:lnTo>
+                  <a:lnTo>
+                    <a:pt x="6087914" y="3301457"/>
+                  </a:lnTo>
+                  <a:lnTo>
+                    <a:pt x="6016292" y="3294700"/>
+                  </a:lnTo>
+                  <a:lnTo>
+                    <a:pt x="5944669" y="3287691"/>
+                  </a:lnTo>
+                  <a:lnTo>
+                    <a:pt x="5873047" y="3280423"/>
+                  </a:lnTo>
+                  <a:lnTo>
+                    <a:pt x="5801424" y="3272886"/>
+                  </a:lnTo>
+                  <a:lnTo>
+                    <a:pt x="5729802" y="3265068"/>
+                  </a:lnTo>
+                  <a:lnTo>
+                    <a:pt x="5658179" y="3256962"/>
+                  </a:lnTo>
+                  <a:lnTo>
+                    <a:pt x="5586557" y="3248554"/>
+                  </a:lnTo>
+                  <a:lnTo>
+                    <a:pt x="5514934" y="3239835"/>
+                  </a:lnTo>
+                  <a:lnTo>
+                    <a:pt x="5443311" y="3230793"/>
+                  </a:lnTo>
+                  <a:lnTo>
+                    <a:pt x="5371689" y="3221415"/>
+                  </a:lnTo>
+                  <a:lnTo>
+                    <a:pt x="5300066" y="3211690"/>
+                  </a:lnTo>
+                  <a:lnTo>
+                    <a:pt x="5228444" y="3201605"/>
+                  </a:lnTo>
+                  <a:lnTo>
+                    <a:pt x="5156821" y="3191145"/>
+                  </a:lnTo>
+                  <a:lnTo>
+                    <a:pt x="5085199" y="3180298"/>
+                  </a:lnTo>
+                  <a:lnTo>
+                    <a:pt x="5013576" y="3169048"/>
+                  </a:lnTo>
+                  <a:lnTo>
+                    <a:pt x="4941954" y="3157382"/>
+                  </a:lnTo>
+                  <a:lnTo>
+                    <a:pt x="4870331" y="3145283"/>
+                  </a:lnTo>
+                  <a:lnTo>
+                    <a:pt x="4798709" y="3132735"/>
+                  </a:lnTo>
+                  <a:lnTo>
+                    <a:pt x="4727086" y="3119722"/>
+                  </a:lnTo>
+                  <a:lnTo>
+                    <a:pt x="4655464" y="3106227"/>
+                  </a:lnTo>
+                  <a:lnTo>
+                    <a:pt x="4583841" y="3092232"/>
+                  </a:lnTo>
+                  <a:lnTo>
+                    <a:pt x="4512219" y="3077717"/>
+                  </a:lnTo>
+                  <a:lnTo>
+                    <a:pt x="4440596" y="3062665"/>
+                  </a:lnTo>
+                  <a:lnTo>
+                    <a:pt x="4368974" y="3047055"/>
+                  </a:lnTo>
+                  <a:lnTo>
+                    <a:pt x="4297351" y="3030866"/>
+                  </a:lnTo>
+                  <a:lnTo>
+                    <a:pt x="4225729" y="3014076"/>
+                  </a:lnTo>
+                  <a:lnTo>
+                    <a:pt x="4154106" y="2996665"/>
+                  </a:lnTo>
+                  <a:lnTo>
+                    <a:pt x="4082483" y="2978608"/>
+                  </a:lnTo>
+                  <a:lnTo>
+                    <a:pt x="4010861" y="2959881"/>
+                  </a:lnTo>
+                  <a:lnTo>
+                    <a:pt x="3939238" y="2940460"/>
+                  </a:lnTo>
+                  <a:lnTo>
+                    <a:pt x="3867616" y="2920320"/>
+                  </a:lnTo>
+                  <a:lnTo>
+                    <a:pt x="3795993" y="2899432"/>
+                  </a:lnTo>
+                  <a:lnTo>
+                    <a:pt x="3724371" y="2877770"/>
+                  </a:lnTo>
+                  <a:lnTo>
+                    <a:pt x="3652748" y="2855306"/>
+                  </a:lnTo>
+                  <a:lnTo>
+                    <a:pt x="3581126" y="2832008"/>
+                  </a:lnTo>
+                  <a:lnTo>
+                    <a:pt x="3509503" y="2807847"/>
+                  </a:lnTo>
+                  <a:lnTo>
+                    <a:pt x="3437881" y="2782790"/>
+                  </a:lnTo>
+                  <a:lnTo>
+                    <a:pt x="3366258" y="2756804"/>
+                  </a:lnTo>
+                  <a:lnTo>
+                    <a:pt x="3294636" y="2729855"/>
+                  </a:lnTo>
+                  <a:lnTo>
+                    <a:pt x="3223013" y="2701906"/>
+                  </a:lnTo>
+                  <a:lnTo>
+                    <a:pt x="3151391" y="2672922"/>
+                  </a:lnTo>
+                  <a:lnTo>
+                    <a:pt x="3079768" y="2664591"/>
+                  </a:lnTo>
+                  <a:lnTo>
+                    <a:pt x="3008146" y="2691412"/>
+                  </a:lnTo>
+                  <a:lnTo>
+                    <a:pt x="2936523" y="2717355"/>
+                  </a:lnTo>
+                  <a:lnTo>
+                    <a:pt x="2864901" y="2742448"/>
+                  </a:lnTo>
+                  <a:lnTo>
+                    <a:pt x="2793278" y="2766720"/>
+                  </a:lnTo>
+                  <a:lnTo>
+                    <a:pt x="2721655" y="2790197"/>
+                  </a:lnTo>
+                  <a:lnTo>
+                    <a:pt x="2650033" y="2812906"/>
+                  </a:lnTo>
+                  <a:lnTo>
+                    <a:pt x="2578410" y="2834870"/>
+                  </a:lnTo>
+                  <a:lnTo>
+                    <a:pt x="2506788" y="2856116"/>
+                  </a:lnTo>
+                  <a:lnTo>
+                    <a:pt x="2435165" y="2876666"/>
+                  </a:lnTo>
+                  <a:lnTo>
+                    <a:pt x="2363543" y="2896543"/>
+                  </a:lnTo>
+                  <a:lnTo>
+                    <a:pt x="2291920" y="2915770"/>
+                  </a:lnTo>
+                  <a:lnTo>
+                    <a:pt x="2220298" y="2934367"/>
+                  </a:lnTo>
+                  <a:lnTo>
+                    <a:pt x="2148675" y="2952355"/>
+                  </a:lnTo>
+                  <a:lnTo>
+                    <a:pt x="2077053" y="2969754"/>
+                  </a:lnTo>
+                  <a:lnTo>
+                    <a:pt x="2005430" y="2986583"/>
+                  </a:lnTo>
+                  <a:lnTo>
+                    <a:pt x="1933808" y="3002861"/>
+                  </a:lnTo>
+                  <a:lnTo>
+                    <a:pt x="1862185" y="3018606"/>
+                  </a:lnTo>
+                  <a:lnTo>
+                    <a:pt x="1790563" y="3033836"/>
+                  </a:lnTo>
+                  <a:lnTo>
+                    <a:pt x="1718940" y="3048567"/>
+                  </a:lnTo>
+                  <a:lnTo>
+                    <a:pt x="1647318" y="3062816"/>
+                  </a:lnTo>
+                  <a:lnTo>
+                    <a:pt x="1575695" y="3076598"/>
+                  </a:lnTo>
+                  <a:lnTo>
+                    <a:pt x="1504073" y="3089929"/>
+                  </a:lnTo>
+                  <a:lnTo>
+                    <a:pt x="1432450" y="3102824"/>
+                  </a:lnTo>
+                  <a:lnTo>
+                    <a:pt x="1360827" y="3115296"/>
+                  </a:lnTo>
+                  <a:lnTo>
+                    <a:pt x="1289205" y="3127360"/>
+                  </a:lnTo>
+                  <a:lnTo>
+                    <a:pt x="1217582" y="3139029"/>
+                  </a:lnTo>
+                  <a:lnTo>
+                    <a:pt x="1145960" y="3150316"/>
+                  </a:lnTo>
+                  <a:lnTo>
+                    <a:pt x="1074337" y="3161233"/>
+                  </a:lnTo>
+                  <a:lnTo>
+                    <a:pt x="1002715" y="3171793"/>
+                  </a:lnTo>
+                  <a:lnTo>
+                    <a:pt x="931092" y="3182007"/>
+                  </a:lnTo>
+                  <a:lnTo>
+                    <a:pt x="859470" y="3191886"/>
+                  </a:lnTo>
+                  <a:lnTo>
+                    <a:pt x="787847" y="3201443"/>
+                  </a:lnTo>
+                  <a:lnTo>
+                    <a:pt x="716225" y="3210686"/>
+                  </a:lnTo>
+                  <a:lnTo>
+                    <a:pt x="644602" y="3219626"/>
+                  </a:lnTo>
+                  <a:lnTo>
+                    <a:pt x="572980" y="3228274"/>
+                  </a:lnTo>
+                  <a:lnTo>
+                    <a:pt x="501357" y="3236639"/>
+                  </a:lnTo>
+                  <a:lnTo>
+                    <a:pt x="429735" y="3244730"/>
+                  </a:lnTo>
+                  <a:lnTo>
+                    <a:pt x="358112" y="3252556"/>
+                  </a:lnTo>
+                  <a:lnTo>
+                    <a:pt x="286490" y="3260126"/>
+                  </a:lnTo>
+                  <a:lnTo>
+                    <a:pt x="214867" y="3267447"/>
+                  </a:lnTo>
+                  <a:lnTo>
+                    <a:pt x="143245" y="3274530"/>
+                  </a:lnTo>
+                  <a:lnTo>
+                    <a:pt x="71622" y="3281380"/>
+                  </a:lnTo>
+                  <a:lnTo>
+                    <a:pt x="0" y="3288006"/>
                   </a:lnTo>
                   <a:close/>
                 </a:path>
@@ -3591,267 +3591,267 @@
           </p:nvSpPr>
           <p:spPr>
             <a:xfrm>
-              <a:off x="1430362" y="2073503"/>
-              <a:ext cx="5912122" cy="2653206"/>
+              <a:off x="1455147" y="2073503"/>
+              <a:ext cx="5910794" cy="2642863"/>
             </a:xfrm>
             <a:custGeom>
               <a:avLst/>
               <a:pathLst>
-                <a:path w="5912122" h="2653206">
+                <a:path w="5910794" h="2642863">
                   <a:moveTo>
                     <a:pt x="0" y="0"/>
                   </a:moveTo>
                   <a:lnTo>
-                    <a:pt x="28177" y="50066"/>
-                  </a:lnTo>
-                  <a:lnTo>
-                    <a:pt x="99799" y="172780"/>
-                  </a:lnTo>
-                  <a:lnTo>
-                    <a:pt x="171422" y="291108"/>
-                  </a:lnTo>
-                  <a:lnTo>
-                    <a:pt x="243044" y="405208"/>
-                  </a:lnTo>
-                  <a:lnTo>
-                    <a:pt x="314667" y="515230"/>
-                  </a:lnTo>
-                  <a:lnTo>
-                    <a:pt x="386289" y="621320"/>
-                  </a:lnTo>
-                  <a:lnTo>
-                    <a:pt x="457912" y="723618"/>
-                  </a:lnTo>
-                  <a:lnTo>
-                    <a:pt x="529534" y="822260"/>
-                  </a:lnTo>
-                  <a:lnTo>
-                    <a:pt x="601157" y="917378"/>
-                  </a:lnTo>
-                  <a:lnTo>
-                    <a:pt x="672779" y="1009095"/>
-                  </a:lnTo>
-                  <a:lnTo>
-                    <a:pt x="744402" y="1097535"/>
-                  </a:lnTo>
-                  <a:lnTo>
-                    <a:pt x="816024" y="1182814"/>
-                  </a:lnTo>
-                  <a:lnTo>
-                    <a:pt x="887647" y="1265046"/>
-                  </a:lnTo>
-                  <a:lnTo>
-                    <a:pt x="959269" y="1344339"/>
-                  </a:lnTo>
-                  <a:lnTo>
-                    <a:pt x="1030892" y="1420798"/>
-                  </a:lnTo>
-                  <a:lnTo>
-                    <a:pt x="1102515" y="1494524"/>
-                  </a:lnTo>
-                  <a:lnTo>
-                    <a:pt x="1174137" y="1565615"/>
-                  </a:lnTo>
-                  <a:lnTo>
-                    <a:pt x="1245760" y="1634166"/>
-                  </a:lnTo>
-                  <a:lnTo>
-                    <a:pt x="1317382" y="1700267"/>
-                  </a:lnTo>
-                  <a:lnTo>
-                    <a:pt x="1389005" y="1764006"/>
-                  </a:lnTo>
-                  <a:lnTo>
-                    <a:pt x="1460627" y="1825466"/>
-                  </a:lnTo>
-                  <a:lnTo>
-                    <a:pt x="1532250" y="1884731"/>
-                  </a:lnTo>
-                  <a:lnTo>
-                    <a:pt x="1603872" y="1941877"/>
-                  </a:lnTo>
-                  <a:lnTo>
-                    <a:pt x="1675495" y="1996981"/>
-                  </a:lnTo>
-                  <a:lnTo>
-                    <a:pt x="1747117" y="2050115"/>
-                  </a:lnTo>
-                  <a:lnTo>
-                    <a:pt x="1818740" y="2101351"/>
-                  </a:lnTo>
-                  <a:lnTo>
-                    <a:pt x="1890362" y="2150755"/>
-                  </a:lnTo>
-                  <a:lnTo>
-                    <a:pt x="1961985" y="2198394"/>
-                  </a:lnTo>
-                  <a:lnTo>
-                    <a:pt x="2033607" y="2244331"/>
-                  </a:lnTo>
-                  <a:lnTo>
-                    <a:pt x="2105230" y="2288625"/>
-                  </a:lnTo>
-                  <a:lnTo>
-                    <a:pt x="2176852" y="2331337"/>
-                  </a:lnTo>
-                  <a:lnTo>
-                    <a:pt x="2248475" y="2372522"/>
-                  </a:lnTo>
-                  <a:lnTo>
-                    <a:pt x="2320097" y="2412235"/>
-                  </a:lnTo>
-                  <a:lnTo>
-                    <a:pt x="2391720" y="2450529"/>
-                  </a:lnTo>
-                  <a:lnTo>
-                    <a:pt x="2463343" y="2487455"/>
-                  </a:lnTo>
-                  <a:lnTo>
-                    <a:pt x="2534965" y="2523061"/>
-                  </a:lnTo>
-                  <a:lnTo>
-                    <a:pt x="2606588" y="2557394"/>
-                  </a:lnTo>
-                  <a:lnTo>
-                    <a:pt x="2678210" y="2590500"/>
-                  </a:lnTo>
-                  <a:lnTo>
-                    <a:pt x="2749833" y="2622423"/>
-                  </a:lnTo>
-                  <a:lnTo>
-                    <a:pt x="2821455" y="2653206"/>
-                  </a:lnTo>
-                  <a:lnTo>
-                    <a:pt x="2893078" y="2627229"/>
-                  </a:lnTo>
-                  <a:lnTo>
-                    <a:pt x="2964700" y="2598243"/>
-                  </a:lnTo>
-                  <a:lnTo>
-                    <a:pt x="3036323" y="2568275"/>
-                  </a:lnTo>
-                  <a:lnTo>
-                    <a:pt x="3107945" y="2537294"/>
-                  </a:lnTo>
-                  <a:lnTo>
-                    <a:pt x="3179568" y="2505263"/>
-                  </a:lnTo>
-                  <a:lnTo>
-                    <a:pt x="3251190" y="2472149"/>
-                  </a:lnTo>
-                  <a:lnTo>
-                    <a:pt x="3322813" y="2437915"/>
-                  </a:lnTo>
-                  <a:lnTo>
-                    <a:pt x="3394435" y="2402521"/>
-                  </a:lnTo>
-                  <a:lnTo>
-                    <a:pt x="3466058" y="2365930"/>
-                  </a:lnTo>
-                  <a:lnTo>
-                    <a:pt x="3537680" y="2328101"/>
-                  </a:lnTo>
-                  <a:lnTo>
-                    <a:pt x="3609303" y="2288991"/>
-                  </a:lnTo>
-                  <a:lnTo>
-                    <a:pt x="3680925" y="2248558"/>
-                  </a:lnTo>
-                  <a:lnTo>
-                    <a:pt x="3752548" y="2206756"/>
-                  </a:lnTo>
-                  <a:lnTo>
-                    <a:pt x="3824171" y="2163540"/>
-                  </a:lnTo>
-                  <a:lnTo>
-                    <a:pt x="3895793" y="2118861"/>
-                  </a:lnTo>
-                  <a:lnTo>
-                    <a:pt x="3967416" y="2072671"/>
-                  </a:lnTo>
-                  <a:lnTo>
-                    <a:pt x="4039038" y="2024917"/>
-                  </a:lnTo>
-                  <a:lnTo>
-                    <a:pt x="4110661" y="1975546"/>
-                  </a:lnTo>
-                  <a:lnTo>
-                    <a:pt x="4182283" y="1924506"/>
-                  </a:lnTo>
-                  <a:lnTo>
-                    <a:pt x="4253906" y="1871737"/>
-                  </a:lnTo>
-                  <a:lnTo>
-                    <a:pt x="4325528" y="1817183"/>
-                  </a:lnTo>
-                  <a:lnTo>
-                    <a:pt x="4397151" y="1760783"/>
-                  </a:lnTo>
-                  <a:lnTo>
-                    <a:pt x="4468773" y="1702474"/>
-                  </a:lnTo>
-                  <a:lnTo>
-                    <a:pt x="4540396" y="1642192"/>
-                  </a:lnTo>
-                  <a:lnTo>
-                    <a:pt x="4612018" y="1579869"/>
-                  </a:lnTo>
-                  <a:lnTo>
-                    <a:pt x="4683641" y="1515438"/>
-                  </a:lnTo>
-                  <a:lnTo>
-                    <a:pt x="4755263" y="1448826"/>
-                  </a:lnTo>
-                  <a:lnTo>
-                    <a:pt x="4826886" y="1379959"/>
-                  </a:lnTo>
-                  <a:lnTo>
-                    <a:pt x="4898508" y="1308763"/>
-                  </a:lnTo>
-                  <a:lnTo>
-                    <a:pt x="4970131" y="1235156"/>
-                  </a:lnTo>
-                  <a:lnTo>
-                    <a:pt x="5041753" y="1159059"/>
-                  </a:lnTo>
-                  <a:lnTo>
-                    <a:pt x="5113376" y="1080386"/>
-                  </a:lnTo>
-                  <a:lnTo>
-                    <a:pt x="5184999" y="999051"/>
-                  </a:lnTo>
-                  <a:lnTo>
-                    <a:pt x="5256621" y="914963"/>
-                  </a:lnTo>
-                  <a:lnTo>
-                    <a:pt x="5328244" y="828030"/>
-                  </a:lnTo>
-                  <a:lnTo>
-                    <a:pt x="5399866" y="738154"/>
-                  </a:lnTo>
-                  <a:lnTo>
-                    <a:pt x="5471489" y="645237"/>
-                  </a:lnTo>
-                  <a:lnTo>
-                    <a:pt x="5543111" y="549176"/>
-                  </a:lnTo>
-                  <a:lnTo>
-                    <a:pt x="5614734" y="449863"/>
-                  </a:lnTo>
-                  <a:lnTo>
-                    <a:pt x="5686356" y="347190"/>
-                  </a:lnTo>
-                  <a:lnTo>
-                    <a:pt x="5757979" y="241041"/>
-                  </a:lnTo>
-                  <a:lnTo>
-                    <a:pt x="5829601" y="131301"/>
-                  </a:lnTo>
-                  <a:lnTo>
-                    <a:pt x="5901224" y="17847"/>
-                  </a:lnTo>
-                  <a:lnTo>
-                    <a:pt x="5912122" y="0"/>
+                    <a:pt x="3392" y="6106"/>
+                  </a:lnTo>
+                  <a:lnTo>
+                    <a:pt x="75014" y="130421"/>
+                  </a:lnTo>
+                  <a:lnTo>
+                    <a:pt x="146637" y="250292"/>
+                  </a:lnTo>
+                  <a:lnTo>
+                    <a:pt x="218260" y="365878"/>
+                  </a:lnTo>
+                  <a:lnTo>
+                    <a:pt x="289882" y="477332"/>
+                  </a:lnTo>
+                  <a:lnTo>
+                    <a:pt x="361505" y="584802"/>
+                  </a:lnTo>
+                  <a:lnTo>
+                    <a:pt x="433127" y="688430"/>
+                  </a:lnTo>
+                  <a:lnTo>
+                    <a:pt x="504750" y="788354"/>
+                  </a:lnTo>
+                  <a:lnTo>
+                    <a:pt x="576372" y="884705"/>
+                  </a:lnTo>
+                  <a:lnTo>
+                    <a:pt x="647995" y="977613"/>
+                  </a:lnTo>
+                  <a:lnTo>
+                    <a:pt x="719617" y="1067199"/>
+                  </a:lnTo>
+                  <a:lnTo>
+                    <a:pt x="791240" y="1153583"/>
+                  </a:lnTo>
+                  <a:lnTo>
+                    <a:pt x="862862" y="1236879"/>
+                  </a:lnTo>
+                  <a:lnTo>
+                    <a:pt x="934485" y="1317198"/>
+                  </a:lnTo>
+                  <a:lnTo>
+                    <a:pt x="1006107" y="1394645"/>
+                  </a:lnTo>
+                  <a:lnTo>
+                    <a:pt x="1077730" y="1469324"/>
+                  </a:lnTo>
+                  <a:lnTo>
+                    <a:pt x="1149352" y="1541333"/>
+                  </a:lnTo>
+                  <a:lnTo>
+                    <a:pt x="1220975" y="1610769"/>
+                  </a:lnTo>
+                  <a:lnTo>
+                    <a:pt x="1292597" y="1677722"/>
+                  </a:lnTo>
+                  <a:lnTo>
+                    <a:pt x="1364220" y="1742281"/>
+                  </a:lnTo>
+                  <a:lnTo>
+                    <a:pt x="1435842" y="1804533"/>
+                  </a:lnTo>
+                  <a:lnTo>
+                    <a:pt x="1507465" y="1864560"/>
+                  </a:lnTo>
+                  <a:lnTo>
+                    <a:pt x="1579088" y="1922441"/>
+                  </a:lnTo>
+                  <a:lnTo>
+                    <a:pt x="1650710" y="1978253"/>
+                  </a:lnTo>
+                  <a:lnTo>
+                    <a:pt x="1722333" y="2032069"/>
+                  </a:lnTo>
+                  <a:lnTo>
+                    <a:pt x="1793955" y="2083962"/>
+                  </a:lnTo>
+                  <a:lnTo>
+                    <a:pt x="1865578" y="2134000"/>
+                  </a:lnTo>
+                  <a:lnTo>
+                    <a:pt x="1937200" y="2182249"/>
+                  </a:lnTo>
+                  <a:lnTo>
+                    <a:pt x="2008823" y="2228774"/>
+                  </a:lnTo>
+                  <a:lnTo>
+                    <a:pt x="2080445" y="2273635"/>
+                  </a:lnTo>
+                  <a:lnTo>
+                    <a:pt x="2152068" y="2316893"/>
+                  </a:lnTo>
+                  <a:lnTo>
+                    <a:pt x="2223690" y="2358604"/>
+                  </a:lnTo>
+                  <a:lnTo>
+                    <a:pt x="2295313" y="2398824"/>
+                  </a:lnTo>
+                  <a:lnTo>
+                    <a:pt x="2366935" y="2437607"/>
+                  </a:lnTo>
+                  <a:lnTo>
+                    <a:pt x="2438558" y="2475003"/>
+                  </a:lnTo>
+                  <a:lnTo>
+                    <a:pt x="2510180" y="2511063"/>
+                  </a:lnTo>
+                  <a:lnTo>
+                    <a:pt x="2581803" y="2545833"/>
+                  </a:lnTo>
+                  <a:lnTo>
+                    <a:pt x="2653425" y="2579361"/>
+                  </a:lnTo>
+                  <a:lnTo>
+                    <a:pt x="2725048" y="2611690"/>
+                  </a:lnTo>
+                  <a:lnTo>
+                    <a:pt x="2796670" y="2642863"/>
+                  </a:lnTo>
+                  <a:lnTo>
+                    <a:pt x="2868293" y="2636862"/>
+                  </a:lnTo>
+                  <a:lnTo>
+                    <a:pt x="2939916" y="2608195"/>
+                  </a:lnTo>
+                  <a:lnTo>
+                    <a:pt x="3011538" y="2578557"/>
+                  </a:lnTo>
+                  <a:lnTo>
+                    <a:pt x="3083161" y="2547915"/>
+                  </a:lnTo>
+                  <a:lnTo>
+                    <a:pt x="3154783" y="2516237"/>
+                  </a:lnTo>
+                  <a:lnTo>
+                    <a:pt x="3226406" y="2483486"/>
+                  </a:lnTo>
+                  <a:lnTo>
+                    <a:pt x="3298028" y="2449627"/>
+                  </a:lnTo>
+                  <a:lnTo>
+                    <a:pt x="3369651" y="2414621"/>
+                  </a:lnTo>
+                  <a:lnTo>
+                    <a:pt x="3441273" y="2378430"/>
+                  </a:lnTo>
+                  <a:lnTo>
+                    <a:pt x="3512896" y="2341015"/>
+                  </a:lnTo>
+                  <a:lnTo>
+                    <a:pt x="3584518" y="2302333"/>
+                  </a:lnTo>
+                  <a:lnTo>
+                    <a:pt x="3656141" y="2262341"/>
+                  </a:lnTo>
+                  <a:lnTo>
+                    <a:pt x="3727763" y="2220996"/>
+                  </a:lnTo>
+                  <a:lnTo>
+                    <a:pt x="3799386" y="2178251"/>
+                  </a:lnTo>
+                  <a:lnTo>
+                    <a:pt x="3871008" y="2134059"/>
+                  </a:lnTo>
+                  <a:lnTo>
+                    <a:pt x="3942631" y="2088371"/>
+                  </a:lnTo>
+                  <a:lnTo>
+                    <a:pt x="4014253" y="2041137"/>
+                  </a:lnTo>
+                  <a:lnTo>
+                    <a:pt x="4085876" y="1992303"/>
+                  </a:lnTo>
+                  <a:lnTo>
+                    <a:pt x="4157498" y="1941817"/>
+                  </a:lnTo>
+                  <a:lnTo>
+                    <a:pt x="4229121" y="1889622"/>
+                  </a:lnTo>
+                  <a:lnTo>
+                    <a:pt x="4300744" y="1835660"/>
+                  </a:lnTo>
+                  <a:lnTo>
+                    <a:pt x="4372366" y="1779871"/>
+                  </a:lnTo>
+                  <a:lnTo>
+                    <a:pt x="4443989" y="1722194"/>
+                  </a:lnTo>
+                  <a:lnTo>
+                    <a:pt x="4515611" y="1662564"/>
+                  </a:lnTo>
+                  <a:lnTo>
+                    <a:pt x="4587234" y="1600916"/>
+                  </a:lnTo>
+                  <a:lnTo>
+                    <a:pt x="4658856" y="1537181"/>
+                  </a:lnTo>
+                  <a:lnTo>
+                    <a:pt x="4730479" y="1471288"/>
+                  </a:lnTo>
+                  <a:lnTo>
+                    <a:pt x="4802101" y="1403165"/>
+                  </a:lnTo>
+                  <a:lnTo>
+                    <a:pt x="4873724" y="1332736"/>
+                  </a:lnTo>
+                  <a:lnTo>
+                    <a:pt x="4945346" y="1259923"/>
+                  </a:lnTo>
+                  <a:lnTo>
+                    <a:pt x="5016969" y="1184646"/>
+                  </a:lnTo>
+                  <a:lnTo>
+                    <a:pt x="5088591" y="1106820"/>
+                  </a:lnTo>
+                  <a:lnTo>
+                    <a:pt x="5160214" y="1026359"/>
+                  </a:lnTo>
+                  <a:lnTo>
+                    <a:pt x="5231836" y="943175"/>
+                  </a:lnTo>
+                  <a:lnTo>
+                    <a:pt x="5303459" y="857175"/>
+                  </a:lnTo>
+                  <a:lnTo>
+                    <a:pt x="5375081" y="768264"/>
+                  </a:lnTo>
+                  <a:lnTo>
+                    <a:pt x="5446704" y="676343"/>
+                  </a:lnTo>
+                  <a:lnTo>
+                    <a:pt x="5518326" y="581311"/>
+                  </a:lnTo>
+                  <a:lnTo>
+                    <a:pt x="5589949" y="483062"/>
+                  </a:lnTo>
+                  <a:lnTo>
+                    <a:pt x="5661571" y="381486"/>
+                  </a:lnTo>
+                  <a:lnTo>
+                    <a:pt x="5733194" y="276473"/>
+                  </a:lnTo>
+                  <a:lnTo>
+                    <a:pt x="5804817" y="167905"/>
+                  </a:lnTo>
+                  <a:lnTo>
+                    <a:pt x="5876439" y="55661"/>
+                  </a:lnTo>
+                  <a:lnTo>
+                    <a:pt x="5910794" y="0"/>
                   </a:lnTo>
                 </a:path>
               </a:pathLst>
@@ -3871,312 +3871,312 @@
           </p:nvSpPr>
           <p:spPr>
             <a:xfrm>
-              <a:off x="1172049" y="4728770"/>
-              <a:ext cx="7090630" cy="720267"/>
+              <a:off x="1172049" y="4738094"/>
+              <a:ext cx="7090630" cy="709650"/>
             </a:xfrm>
             <a:custGeom>
               <a:avLst/>
               <a:pathLst>
-                <a:path w="7090630" h="720267">
+                <a:path w="7090630" h="709650">
                   <a:moveTo>
-                    <a:pt x="7090630" y="720267"/>
+                    <a:pt x="7090630" y="709650"/>
                   </a:moveTo>
                   <a:lnTo>
-                    <a:pt x="7019007" y="716257"/>
-                  </a:lnTo>
-                  <a:lnTo>
-                    <a:pt x="6947385" y="712097"/>
-                  </a:lnTo>
-                  <a:lnTo>
-                    <a:pt x="6875762" y="707784"/>
-                  </a:lnTo>
-                  <a:lnTo>
-                    <a:pt x="6804139" y="703310"/>
-                  </a:lnTo>
-                  <a:lnTo>
-                    <a:pt x="6732517" y="698671"/>
-                  </a:lnTo>
-                  <a:lnTo>
-                    <a:pt x="6660894" y="693860"/>
-                  </a:lnTo>
-                  <a:lnTo>
-                    <a:pt x="6589272" y="688871"/>
-                  </a:lnTo>
-                  <a:lnTo>
-                    <a:pt x="6517649" y="683697"/>
-                  </a:lnTo>
-                  <a:lnTo>
-                    <a:pt x="6446027" y="678331"/>
-                  </a:lnTo>
-                  <a:lnTo>
-                    <a:pt x="6374404" y="672766"/>
-                  </a:lnTo>
-                  <a:lnTo>
-                    <a:pt x="6302782" y="666994"/>
-                  </a:lnTo>
-                  <a:lnTo>
-                    <a:pt x="6231159" y="661009"/>
-                  </a:lnTo>
-                  <a:lnTo>
-                    <a:pt x="6159537" y="654802"/>
-                  </a:lnTo>
-                  <a:lnTo>
-                    <a:pt x="6087914" y="648365"/>
-                  </a:lnTo>
-                  <a:lnTo>
-                    <a:pt x="6016292" y="641690"/>
-                  </a:lnTo>
-                  <a:lnTo>
-                    <a:pt x="5944669" y="634767"/>
-                  </a:lnTo>
-                  <a:lnTo>
-                    <a:pt x="5873047" y="627587"/>
-                  </a:lnTo>
-                  <a:lnTo>
-                    <a:pt x="5801424" y="620142"/>
-                  </a:lnTo>
-                  <a:lnTo>
-                    <a:pt x="5729802" y="612420"/>
-                  </a:lnTo>
-                  <a:lnTo>
-                    <a:pt x="5658179" y="604412"/>
-                  </a:lnTo>
-                  <a:lnTo>
-                    <a:pt x="5586557" y="596108"/>
-                  </a:lnTo>
-                  <a:lnTo>
-                    <a:pt x="5514934" y="587496"/>
-                  </a:lnTo>
-                  <a:lnTo>
-                    <a:pt x="5443311" y="578564"/>
-                  </a:lnTo>
-                  <a:lnTo>
-                    <a:pt x="5371689" y="569301"/>
-                  </a:lnTo>
-                  <a:lnTo>
-                    <a:pt x="5300066" y="559695"/>
-                  </a:lnTo>
-                  <a:lnTo>
-                    <a:pt x="5228444" y="549734"/>
-                  </a:lnTo>
-                  <a:lnTo>
-                    <a:pt x="5156821" y="539402"/>
-                  </a:lnTo>
-                  <a:lnTo>
-                    <a:pt x="5085199" y="528688"/>
-                  </a:lnTo>
-                  <a:lnTo>
-                    <a:pt x="5013576" y="517577"/>
-                  </a:lnTo>
-                  <a:lnTo>
-                    <a:pt x="4941954" y="506054"/>
-                  </a:lnTo>
-                  <a:lnTo>
-                    <a:pt x="4870331" y="494104"/>
-                  </a:lnTo>
-                  <a:lnTo>
-                    <a:pt x="4798709" y="481712"/>
-                  </a:lnTo>
-                  <a:lnTo>
-                    <a:pt x="4727086" y="468859"/>
-                  </a:lnTo>
-                  <a:lnTo>
-                    <a:pt x="4655464" y="455531"/>
-                  </a:lnTo>
-                  <a:lnTo>
-                    <a:pt x="4583841" y="441708"/>
-                  </a:lnTo>
-                  <a:lnTo>
-                    <a:pt x="4512219" y="427373"/>
-                  </a:lnTo>
-                  <a:lnTo>
-                    <a:pt x="4440596" y="412507"/>
-                  </a:lnTo>
-                  <a:lnTo>
-                    <a:pt x="4368974" y="397090"/>
-                  </a:lnTo>
-                  <a:lnTo>
-                    <a:pt x="4297351" y="381102"/>
-                  </a:lnTo>
-                  <a:lnTo>
-                    <a:pt x="4225729" y="364520"/>
-                  </a:lnTo>
-                  <a:lnTo>
-                    <a:pt x="4154106" y="347325"/>
-                  </a:lnTo>
-                  <a:lnTo>
-                    <a:pt x="4082483" y="329492"/>
-                  </a:lnTo>
-                  <a:lnTo>
-                    <a:pt x="4010861" y="310998"/>
-                  </a:lnTo>
-                  <a:lnTo>
-                    <a:pt x="3939238" y="291818"/>
-                  </a:lnTo>
-                  <a:lnTo>
-                    <a:pt x="3867616" y="271928"/>
-                  </a:lnTo>
-                  <a:lnTo>
-                    <a:pt x="3795993" y="251301"/>
-                  </a:lnTo>
-                  <a:lnTo>
-                    <a:pt x="3724371" y="229909"/>
-                  </a:lnTo>
-                  <a:lnTo>
-                    <a:pt x="3652748" y="207724"/>
-                  </a:lnTo>
-                  <a:lnTo>
-                    <a:pt x="3581126" y="184717"/>
-                  </a:lnTo>
-                  <a:lnTo>
-                    <a:pt x="3509503" y="160858"/>
-                  </a:lnTo>
-                  <a:lnTo>
-                    <a:pt x="3437881" y="136114"/>
-                  </a:lnTo>
-                  <a:lnTo>
-                    <a:pt x="3366258" y="110453"/>
-                  </a:lnTo>
-                  <a:lnTo>
-                    <a:pt x="3294636" y="83840"/>
-                  </a:lnTo>
-                  <a:lnTo>
-                    <a:pt x="3223013" y="56242"/>
-                  </a:lnTo>
-                  <a:lnTo>
-                    <a:pt x="3151391" y="27621"/>
+                    <a:pt x="7019007" y="705590"/>
+                  </a:lnTo>
+                  <a:lnTo>
+                    <a:pt x="6947385" y="701380"/>
+                  </a:lnTo>
+                  <a:lnTo>
+                    <a:pt x="6875762" y="697014"/>
+                  </a:lnTo>
+                  <a:lnTo>
+                    <a:pt x="6804139" y="692486"/>
+                  </a:lnTo>
+                  <a:lnTo>
+                    <a:pt x="6732517" y="687790"/>
+                  </a:lnTo>
+                  <a:lnTo>
+                    <a:pt x="6660894" y="682920"/>
+                  </a:lnTo>
+                  <a:lnTo>
+                    <a:pt x="6589272" y="677869"/>
+                  </a:lnTo>
+                  <a:lnTo>
+                    <a:pt x="6517649" y="672632"/>
+                  </a:lnTo>
+                  <a:lnTo>
+                    <a:pt x="6446027" y="667200"/>
+                  </a:lnTo>
+                  <a:lnTo>
+                    <a:pt x="6374404" y="661566"/>
+                  </a:lnTo>
+                  <a:lnTo>
+                    <a:pt x="6302782" y="655724"/>
+                  </a:lnTo>
+                  <a:lnTo>
+                    <a:pt x="6231159" y="649666"/>
+                  </a:lnTo>
+                  <a:lnTo>
+                    <a:pt x="6159537" y="643382"/>
+                  </a:lnTo>
+                  <a:lnTo>
+                    <a:pt x="6087914" y="636866"/>
+                  </a:lnTo>
+                  <a:lnTo>
+                    <a:pt x="6016292" y="630108"/>
+                  </a:lnTo>
+                  <a:lnTo>
+                    <a:pt x="5944669" y="623100"/>
+                  </a:lnTo>
+                  <a:lnTo>
+                    <a:pt x="5873047" y="615832"/>
+                  </a:lnTo>
+                  <a:lnTo>
+                    <a:pt x="5801424" y="608294"/>
+                  </a:lnTo>
+                  <a:lnTo>
+                    <a:pt x="5729802" y="600477"/>
+                  </a:lnTo>
+                  <a:lnTo>
+                    <a:pt x="5658179" y="592370"/>
+                  </a:lnTo>
+                  <a:lnTo>
+                    <a:pt x="5586557" y="583963"/>
+                  </a:lnTo>
+                  <a:lnTo>
+                    <a:pt x="5514934" y="575244"/>
+                  </a:lnTo>
+                  <a:lnTo>
+                    <a:pt x="5443311" y="566201"/>
+                  </a:lnTo>
+                  <a:lnTo>
+                    <a:pt x="5371689" y="556824"/>
+                  </a:lnTo>
+                  <a:lnTo>
+                    <a:pt x="5300066" y="547099"/>
+                  </a:lnTo>
+                  <a:lnTo>
+                    <a:pt x="5228444" y="537013"/>
+                  </a:lnTo>
+                  <a:lnTo>
+                    <a:pt x="5156821" y="526553"/>
+                  </a:lnTo>
+                  <a:lnTo>
+                    <a:pt x="5085199" y="515706"/>
+                  </a:lnTo>
+                  <a:lnTo>
+                    <a:pt x="5013576" y="504457"/>
+                  </a:lnTo>
+                  <a:lnTo>
+                    <a:pt x="4941954" y="492790"/>
+                  </a:lnTo>
+                  <a:lnTo>
+                    <a:pt x="4870331" y="480691"/>
+                  </a:lnTo>
+                  <a:lnTo>
+                    <a:pt x="4798709" y="468143"/>
+                  </a:lnTo>
+                  <a:lnTo>
+                    <a:pt x="4727086" y="455131"/>
+                  </a:lnTo>
+                  <a:lnTo>
+                    <a:pt x="4655464" y="441636"/>
+                  </a:lnTo>
+                  <a:lnTo>
+                    <a:pt x="4583841" y="427640"/>
+                  </a:lnTo>
+                  <a:lnTo>
+                    <a:pt x="4512219" y="413126"/>
+                  </a:lnTo>
+                  <a:lnTo>
+                    <a:pt x="4440596" y="398074"/>
+                  </a:lnTo>
+                  <a:lnTo>
+                    <a:pt x="4368974" y="382463"/>
+                  </a:lnTo>
+                  <a:lnTo>
+                    <a:pt x="4297351" y="366274"/>
+                  </a:lnTo>
+                  <a:lnTo>
+                    <a:pt x="4225729" y="349485"/>
+                  </a:lnTo>
+                  <a:lnTo>
+                    <a:pt x="4154106" y="332073"/>
+                  </a:lnTo>
+                  <a:lnTo>
+                    <a:pt x="4082483" y="314016"/>
+                  </a:lnTo>
+                  <a:lnTo>
+                    <a:pt x="4010861" y="295290"/>
+                  </a:lnTo>
+                  <a:lnTo>
+                    <a:pt x="3939238" y="275869"/>
+                  </a:lnTo>
+                  <a:lnTo>
+                    <a:pt x="3867616" y="255728"/>
+                  </a:lnTo>
+                  <a:lnTo>
+                    <a:pt x="3795993" y="234841"/>
+                  </a:lnTo>
+                  <a:lnTo>
+                    <a:pt x="3724371" y="213179"/>
+                  </a:lnTo>
+                  <a:lnTo>
+                    <a:pt x="3652748" y="190714"/>
+                  </a:lnTo>
+                  <a:lnTo>
+                    <a:pt x="3581126" y="167417"/>
+                  </a:lnTo>
+                  <a:lnTo>
+                    <a:pt x="3509503" y="143255"/>
+                  </a:lnTo>
+                  <a:lnTo>
+                    <a:pt x="3437881" y="118198"/>
+                  </a:lnTo>
+                  <a:lnTo>
+                    <a:pt x="3366258" y="92212"/>
+                  </a:lnTo>
+                  <a:lnTo>
+                    <a:pt x="3294636" y="65263"/>
+                  </a:lnTo>
+                  <a:lnTo>
+                    <a:pt x="3223013" y="37315"/>
+                  </a:lnTo>
+                  <a:lnTo>
+                    <a:pt x="3151391" y="8330"/>
                   </a:lnTo>
                   <a:lnTo>
                     <a:pt x="3079768" y="0"/>
                   </a:lnTo>
                   <a:lnTo>
-                    <a:pt x="3008146" y="27119"/>
-                  </a:lnTo>
-                  <a:lnTo>
-                    <a:pt x="2936523" y="53351"/>
-                  </a:lnTo>
-                  <a:lnTo>
-                    <a:pt x="2864901" y="78725"/>
-                  </a:lnTo>
-                  <a:lnTo>
-                    <a:pt x="2793278" y="103268"/>
-                  </a:lnTo>
-                  <a:lnTo>
-                    <a:pt x="2721655" y="127007"/>
-                  </a:lnTo>
-                  <a:lnTo>
-                    <a:pt x="2650033" y="149969"/>
-                  </a:lnTo>
-                  <a:lnTo>
-                    <a:pt x="2578410" y="172180"/>
-                  </a:lnTo>
-                  <a:lnTo>
-                    <a:pt x="2506788" y="193664"/>
-                  </a:lnTo>
-                  <a:lnTo>
-                    <a:pt x="2435165" y="214444"/>
-                  </a:lnTo>
-                  <a:lnTo>
-                    <a:pt x="2363543" y="234544"/>
-                  </a:lnTo>
-                  <a:lnTo>
-                    <a:pt x="2291920" y="253986"/>
-                  </a:lnTo>
-                  <a:lnTo>
-                    <a:pt x="2220298" y="272792"/>
-                  </a:lnTo>
-                  <a:lnTo>
-                    <a:pt x="2148675" y="290982"/>
-                  </a:lnTo>
-                  <a:lnTo>
-                    <a:pt x="2077053" y="308577"/>
-                  </a:lnTo>
-                  <a:lnTo>
-                    <a:pt x="2005430" y="325595"/>
-                  </a:lnTo>
-                  <a:lnTo>
-                    <a:pt x="1933808" y="342057"/>
-                  </a:lnTo>
-                  <a:lnTo>
-                    <a:pt x="1862185" y="357980"/>
-                  </a:lnTo>
-                  <a:lnTo>
-                    <a:pt x="1790563" y="373381"/>
-                  </a:lnTo>
-                  <a:lnTo>
-                    <a:pt x="1718940" y="388279"/>
-                  </a:lnTo>
-                  <a:lnTo>
-                    <a:pt x="1647318" y="402688"/>
-                  </a:lnTo>
-                  <a:lnTo>
-                    <a:pt x="1575695" y="416626"/>
-                  </a:lnTo>
-                  <a:lnTo>
-                    <a:pt x="1504073" y="430108"/>
-                  </a:lnTo>
-                  <a:lnTo>
-                    <a:pt x="1432450" y="443149"/>
-                  </a:lnTo>
-                  <a:lnTo>
-                    <a:pt x="1360827" y="455762"/>
-                  </a:lnTo>
-                  <a:lnTo>
-                    <a:pt x="1289205" y="467963"/>
-                  </a:lnTo>
-                  <a:lnTo>
-                    <a:pt x="1217582" y="479764"/>
-                  </a:lnTo>
-                  <a:lnTo>
-                    <a:pt x="1145960" y="491179"/>
-                  </a:lnTo>
-                  <a:lnTo>
-                    <a:pt x="1074337" y="502221"/>
-                  </a:lnTo>
-                  <a:lnTo>
-                    <a:pt x="1002715" y="512900"/>
-                  </a:lnTo>
-                  <a:lnTo>
-                    <a:pt x="931092" y="523231"/>
-                  </a:lnTo>
-                  <a:lnTo>
-                    <a:pt x="859470" y="533223"/>
-                  </a:lnTo>
-                  <a:lnTo>
-                    <a:pt x="787847" y="542888"/>
-                  </a:lnTo>
-                  <a:lnTo>
-                    <a:pt x="716225" y="552237"/>
-                  </a:lnTo>
-                  <a:lnTo>
-                    <a:pt x="644602" y="561279"/>
-                  </a:lnTo>
-                  <a:lnTo>
-                    <a:pt x="572980" y="570026"/>
-                  </a:lnTo>
-                  <a:lnTo>
-                    <a:pt x="501357" y="578486"/>
-                  </a:lnTo>
-                  <a:lnTo>
-                    <a:pt x="429735" y="586670"/>
-                  </a:lnTo>
-                  <a:lnTo>
-                    <a:pt x="358112" y="594585"/>
-                  </a:lnTo>
-                  <a:lnTo>
-                    <a:pt x="286490" y="602242"/>
-                  </a:lnTo>
-                  <a:lnTo>
-                    <a:pt x="214867" y="609647"/>
-                  </a:lnTo>
-                  <a:lnTo>
-                    <a:pt x="143245" y="616811"/>
-                  </a:lnTo>
-                  <a:lnTo>
-                    <a:pt x="71622" y="623739"/>
-                  </a:lnTo>
-                  <a:lnTo>
-                    <a:pt x="0" y="630442"/>
+                    <a:pt x="3008146" y="26821"/>
+                  </a:lnTo>
+                  <a:lnTo>
+                    <a:pt x="2936523" y="52763"/>
+                  </a:lnTo>
+                  <a:lnTo>
+                    <a:pt x="2864901" y="77857"/>
+                  </a:lnTo>
+                  <a:lnTo>
+                    <a:pt x="2793278" y="102129"/>
+                  </a:lnTo>
+                  <a:lnTo>
+                    <a:pt x="2721655" y="125606"/>
+                  </a:lnTo>
+                  <a:lnTo>
+                    <a:pt x="2650033" y="148314"/>
+                  </a:lnTo>
+                  <a:lnTo>
+                    <a:pt x="2578410" y="170279"/>
+                  </a:lnTo>
+                  <a:lnTo>
+                    <a:pt x="2506788" y="191525"/>
+                  </a:lnTo>
+                  <a:lnTo>
+                    <a:pt x="2435165" y="212075"/>
+                  </a:lnTo>
+                  <a:lnTo>
+                    <a:pt x="2363543" y="231952"/>
+                  </a:lnTo>
+                  <a:lnTo>
+                    <a:pt x="2291920" y="251178"/>
+                  </a:lnTo>
+                  <a:lnTo>
+                    <a:pt x="2220298" y="269775"/>
+                  </a:lnTo>
+                  <a:lnTo>
+                    <a:pt x="2148675" y="287763"/>
+                  </a:lnTo>
+                  <a:lnTo>
+                    <a:pt x="2077053" y="305162"/>
+                  </a:lnTo>
+                  <a:lnTo>
+                    <a:pt x="2005430" y="321991"/>
+                  </a:lnTo>
+                  <a:lnTo>
+                    <a:pt x="1933808" y="338270"/>
+                  </a:lnTo>
+                  <a:lnTo>
+                    <a:pt x="1862185" y="354015"/>
+                  </a:lnTo>
+                  <a:lnTo>
+                    <a:pt x="1790563" y="369245"/>
+                  </a:lnTo>
+                  <a:lnTo>
+                    <a:pt x="1718940" y="383976"/>
+                  </a:lnTo>
+                  <a:lnTo>
+                    <a:pt x="1647318" y="398224"/>
+                  </a:lnTo>
+                  <a:lnTo>
+                    <a:pt x="1575695" y="412007"/>
+                  </a:lnTo>
+                  <a:lnTo>
+                    <a:pt x="1504073" y="425338"/>
+                  </a:lnTo>
+                  <a:lnTo>
+                    <a:pt x="1432450" y="438232"/>
+                  </a:lnTo>
+                  <a:lnTo>
+                    <a:pt x="1360827" y="450704"/>
+                  </a:lnTo>
+                  <a:lnTo>
+                    <a:pt x="1289205" y="462768"/>
+                  </a:lnTo>
+                  <a:lnTo>
+                    <a:pt x="1217582" y="474437"/>
+                  </a:lnTo>
+                  <a:lnTo>
+                    <a:pt x="1145960" y="485724"/>
+                  </a:lnTo>
+                  <a:lnTo>
+                    <a:pt x="1074337" y="496641"/>
+                  </a:lnTo>
+                  <a:lnTo>
+                    <a:pt x="1002715" y="507201"/>
+                  </a:lnTo>
+                  <a:lnTo>
+                    <a:pt x="931092" y="517415"/>
+                  </a:lnTo>
+                  <a:lnTo>
+                    <a:pt x="859470" y="527295"/>
+                  </a:lnTo>
+                  <a:lnTo>
+                    <a:pt x="787847" y="536851"/>
+                  </a:lnTo>
+                  <a:lnTo>
+                    <a:pt x="716225" y="546094"/>
+                  </a:lnTo>
+                  <a:lnTo>
+                    <a:pt x="644602" y="555035"/>
+                  </a:lnTo>
+                  <a:lnTo>
+                    <a:pt x="572980" y="563683"/>
+                  </a:lnTo>
+                  <a:lnTo>
+                    <a:pt x="501357" y="572048"/>
+                  </a:lnTo>
+                  <a:lnTo>
+                    <a:pt x="429735" y="580138"/>
+                  </a:lnTo>
+                  <a:lnTo>
+                    <a:pt x="358112" y="587964"/>
+                  </a:lnTo>
+                  <a:lnTo>
+                    <a:pt x="286490" y="595534"/>
+                  </a:lnTo>
+                  <a:lnTo>
+                    <a:pt x="214867" y="602856"/>
+                  </a:lnTo>
+                  <a:lnTo>
+                    <a:pt x="143245" y="609938"/>
+                  </a:lnTo>
+                  <a:lnTo>
+                    <a:pt x="71622" y="616788"/>
+                  </a:lnTo>
+                  <a:lnTo>
+                    <a:pt x="0" y="623414"/>
                   </a:lnTo>
                 </a:path>
               </a:pathLst>
@@ -4196,312 +4196,312 @@
           </p:nvSpPr>
           <p:spPr>
             <a:xfrm>
-              <a:off x="1172049" y="4670371"/>
-              <a:ext cx="7090630" cy="126554"/>
+              <a:off x="1172049" y="4669888"/>
+              <a:ext cx="7090630" cy="126652"/>
             </a:xfrm>
             <a:custGeom>
               <a:avLst/>
               <a:pathLst>
-                <a:path w="7090630" h="126554">
+                <a:path w="7090630" h="126652">
                   <a:moveTo>
                     <a:pt x="0" y="0"/>
                   </a:moveTo>
                   <a:lnTo>
-                    <a:pt x="71622" y="1378"/>
-                  </a:lnTo>
-                  <a:lnTo>
-                    <a:pt x="143245" y="2754"/>
-                  </a:lnTo>
-                  <a:lnTo>
-                    <a:pt x="214867" y="4128"/>
-                  </a:lnTo>
-                  <a:lnTo>
-                    <a:pt x="286490" y="5499"/>
-                  </a:lnTo>
-                  <a:lnTo>
-                    <a:pt x="358112" y="6869"/>
-                  </a:lnTo>
-                  <a:lnTo>
-                    <a:pt x="429735" y="8237"/>
-                  </a:lnTo>
-                  <a:lnTo>
-                    <a:pt x="501357" y="9602"/>
-                  </a:lnTo>
-                  <a:lnTo>
-                    <a:pt x="572980" y="10965"/>
-                  </a:lnTo>
-                  <a:lnTo>
-                    <a:pt x="644602" y="12326"/>
-                  </a:lnTo>
-                  <a:lnTo>
-                    <a:pt x="716225" y="13685"/>
-                  </a:lnTo>
-                  <a:lnTo>
-                    <a:pt x="787847" y="15042"/>
-                  </a:lnTo>
-                  <a:lnTo>
-                    <a:pt x="859470" y="16397"/>
-                  </a:lnTo>
-                  <a:lnTo>
-                    <a:pt x="931092" y="17750"/>
-                  </a:lnTo>
-                  <a:lnTo>
-                    <a:pt x="1002715" y="19100"/>
-                  </a:lnTo>
-                  <a:lnTo>
-                    <a:pt x="1074337" y="20449"/>
-                  </a:lnTo>
-                  <a:lnTo>
-                    <a:pt x="1145960" y="21795"/>
-                  </a:lnTo>
-                  <a:lnTo>
-                    <a:pt x="1217582" y="23140"/>
-                  </a:lnTo>
-                  <a:lnTo>
-                    <a:pt x="1289205" y="24482"/>
-                  </a:lnTo>
-                  <a:lnTo>
-                    <a:pt x="1360827" y="25822"/>
-                  </a:lnTo>
-                  <a:lnTo>
-                    <a:pt x="1432450" y="27160"/>
-                  </a:lnTo>
-                  <a:lnTo>
-                    <a:pt x="1504073" y="28496"/>
-                  </a:lnTo>
-                  <a:lnTo>
-                    <a:pt x="1575695" y="29830"/>
-                  </a:lnTo>
-                  <a:lnTo>
-                    <a:pt x="1647318" y="31162"/>
-                  </a:lnTo>
-                  <a:lnTo>
-                    <a:pt x="1718940" y="32492"/>
-                  </a:lnTo>
-                  <a:lnTo>
-                    <a:pt x="1790563" y="33819"/>
-                  </a:lnTo>
-                  <a:lnTo>
-                    <a:pt x="1862185" y="35145"/>
-                  </a:lnTo>
-                  <a:lnTo>
-                    <a:pt x="1933808" y="36469"/>
-                  </a:lnTo>
-                  <a:lnTo>
-                    <a:pt x="2005430" y="37790"/>
-                  </a:lnTo>
-                  <a:lnTo>
-                    <a:pt x="2077053" y="39109"/>
-                  </a:lnTo>
-                  <a:lnTo>
-                    <a:pt x="2148675" y="40427"/>
-                  </a:lnTo>
-                  <a:lnTo>
-                    <a:pt x="2220298" y="41742"/>
-                  </a:lnTo>
-                  <a:lnTo>
-                    <a:pt x="2291920" y="43056"/>
-                  </a:lnTo>
-                  <a:lnTo>
-                    <a:pt x="2363543" y="44367"/>
-                  </a:lnTo>
-                  <a:lnTo>
-                    <a:pt x="2435165" y="45676"/>
-                  </a:lnTo>
-                  <a:lnTo>
-                    <a:pt x="2506788" y="46983"/>
-                  </a:lnTo>
-                  <a:lnTo>
-                    <a:pt x="2578410" y="48289"/>
-                  </a:lnTo>
-                  <a:lnTo>
-                    <a:pt x="2650033" y="49592"/>
-                  </a:lnTo>
-                  <a:lnTo>
-                    <a:pt x="2721655" y="50893"/>
-                  </a:lnTo>
-                  <a:lnTo>
-                    <a:pt x="2793278" y="52192"/>
-                  </a:lnTo>
-                  <a:lnTo>
-                    <a:pt x="2864901" y="53489"/>
-                  </a:lnTo>
-                  <a:lnTo>
-                    <a:pt x="2936523" y="54784"/>
-                  </a:lnTo>
-                  <a:lnTo>
-                    <a:pt x="3008146" y="56077"/>
-                  </a:lnTo>
-                  <a:lnTo>
-                    <a:pt x="3079768" y="57368"/>
-                  </a:lnTo>
-                  <a:lnTo>
-                    <a:pt x="3151391" y="58657"/>
-                  </a:lnTo>
-                  <a:lnTo>
-                    <a:pt x="3223013" y="59944"/>
-                  </a:lnTo>
-                  <a:lnTo>
-                    <a:pt x="3294636" y="61229"/>
-                  </a:lnTo>
-                  <a:lnTo>
-                    <a:pt x="3366258" y="62512"/>
-                  </a:lnTo>
-                  <a:lnTo>
-                    <a:pt x="3437881" y="63793"/>
-                  </a:lnTo>
-                  <a:lnTo>
-                    <a:pt x="3509503" y="65072"/>
-                  </a:lnTo>
-                  <a:lnTo>
-                    <a:pt x="3581126" y="66349"/>
-                  </a:lnTo>
-                  <a:lnTo>
-                    <a:pt x="3652748" y="67625"/>
-                  </a:lnTo>
-                  <a:lnTo>
-                    <a:pt x="3724371" y="68898"/>
-                  </a:lnTo>
-                  <a:lnTo>
-                    <a:pt x="3795993" y="70169"/>
-                  </a:lnTo>
-                  <a:lnTo>
-                    <a:pt x="3867616" y="71438"/>
-                  </a:lnTo>
-                  <a:lnTo>
-                    <a:pt x="3939238" y="72705"/>
-                  </a:lnTo>
-                  <a:lnTo>
-                    <a:pt x="4010861" y="73970"/>
-                  </a:lnTo>
-                  <a:lnTo>
-                    <a:pt x="4082483" y="75234"/>
-                  </a:lnTo>
-                  <a:lnTo>
-                    <a:pt x="4154106" y="76495"/>
-                  </a:lnTo>
-                  <a:lnTo>
-                    <a:pt x="4225729" y="77754"/>
-                  </a:lnTo>
-                  <a:lnTo>
-                    <a:pt x="4297351" y="79011"/>
-                  </a:lnTo>
-                  <a:lnTo>
-                    <a:pt x="4368974" y="80267"/>
-                  </a:lnTo>
-                  <a:lnTo>
-                    <a:pt x="4440596" y="81520"/>
-                  </a:lnTo>
-                  <a:lnTo>
-                    <a:pt x="4512219" y="82772"/>
-                  </a:lnTo>
-                  <a:lnTo>
-                    <a:pt x="4583841" y="84021"/>
-                  </a:lnTo>
-                  <a:lnTo>
-                    <a:pt x="4655464" y="85269"/>
-                  </a:lnTo>
-                  <a:lnTo>
-                    <a:pt x="4727086" y="86515"/>
-                  </a:lnTo>
-                  <a:lnTo>
-                    <a:pt x="4798709" y="87758"/>
-                  </a:lnTo>
-                  <a:lnTo>
-                    <a:pt x="4870331" y="89000"/>
-                  </a:lnTo>
-                  <a:lnTo>
-                    <a:pt x="4941954" y="90240"/>
-                  </a:lnTo>
-                  <a:lnTo>
-                    <a:pt x="5013576" y="91478"/>
-                  </a:lnTo>
-                  <a:lnTo>
-                    <a:pt x="5085199" y="92714"/>
-                  </a:lnTo>
-                  <a:lnTo>
-                    <a:pt x="5156821" y="93948"/>
-                  </a:lnTo>
-                  <a:lnTo>
-                    <a:pt x="5228444" y="95180"/>
-                  </a:lnTo>
-                  <a:lnTo>
-                    <a:pt x="5300066" y="96411"/>
-                  </a:lnTo>
-                  <a:lnTo>
-                    <a:pt x="5371689" y="97639"/>
-                  </a:lnTo>
-                  <a:lnTo>
-                    <a:pt x="5443311" y="98866"/>
-                  </a:lnTo>
-                  <a:lnTo>
-                    <a:pt x="5514934" y="100090"/>
-                  </a:lnTo>
-                  <a:lnTo>
-                    <a:pt x="5586557" y="101313"/>
-                  </a:lnTo>
-                  <a:lnTo>
-                    <a:pt x="5658179" y="102534"/>
-                  </a:lnTo>
-                  <a:lnTo>
-                    <a:pt x="5729802" y="103752"/>
-                  </a:lnTo>
-                  <a:lnTo>
-                    <a:pt x="5801424" y="104969"/>
-                  </a:lnTo>
-                  <a:lnTo>
-                    <a:pt x="5873047" y="106184"/>
-                  </a:lnTo>
-                  <a:lnTo>
-                    <a:pt x="5944669" y="107398"/>
-                  </a:lnTo>
-                  <a:lnTo>
-                    <a:pt x="6016292" y="108609"/>
-                  </a:lnTo>
-                  <a:lnTo>
-                    <a:pt x="6087914" y="109818"/>
-                  </a:lnTo>
-                  <a:lnTo>
-                    <a:pt x="6159537" y="111026"/>
-                  </a:lnTo>
-                  <a:lnTo>
-                    <a:pt x="6231159" y="112231"/>
-                  </a:lnTo>
-                  <a:lnTo>
-                    <a:pt x="6302782" y="113435"/>
-                  </a:lnTo>
-                  <a:lnTo>
-                    <a:pt x="6374404" y="114637"/>
-                  </a:lnTo>
-                  <a:lnTo>
-                    <a:pt x="6446027" y="115837"/>
-                  </a:lnTo>
-                  <a:lnTo>
-                    <a:pt x="6517649" y="117035"/>
-                  </a:lnTo>
-                  <a:lnTo>
-                    <a:pt x="6589272" y="118232"/>
-                  </a:lnTo>
-                  <a:lnTo>
-                    <a:pt x="6660894" y="119426"/>
-                  </a:lnTo>
-                  <a:lnTo>
-                    <a:pt x="6732517" y="120619"/>
-                  </a:lnTo>
-                  <a:lnTo>
-                    <a:pt x="6804139" y="121810"/>
-                  </a:lnTo>
-                  <a:lnTo>
-                    <a:pt x="6875762" y="122998"/>
-                  </a:lnTo>
-                  <a:lnTo>
-                    <a:pt x="6947385" y="124185"/>
-                  </a:lnTo>
-                  <a:lnTo>
-                    <a:pt x="7019007" y="125371"/>
-                  </a:lnTo>
-                  <a:lnTo>
-                    <a:pt x="7090630" y="126554"/>
+                    <a:pt x="71622" y="1379"/>
+                  </a:lnTo>
+                  <a:lnTo>
+                    <a:pt x="143245" y="2756"/>
+                  </a:lnTo>
+                  <a:lnTo>
+                    <a:pt x="214867" y="4131"/>
+                  </a:lnTo>
+                  <a:lnTo>
+                    <a:pt x="286490" y="5504"/>
+                  </a:lnTo>
+                  <a:lnTo>
+                    <a:pt x="358112" y="6874"/>
+                  </a:lnTo>
+                  <a:lnTo>
+                    <a:pt x="429735" y="8243"/>
+                  </a:lnTo>
+                  <a:lnTo>
+                    <a:pt x="501357" y="9610"/>
+                  </a:lnTo>
+                  <a:lnTo>
+                    <a:pt x="572980" y="10974"/>
+                  </a:lnTo>
+                  <a:lnTo>
+                    <a:pt x="644602" y="12336"/>
+                  </a:lnTo>
+                  <a:lnTo>
+                    <a:pt x="716225" y="13696"/>
+                  </a:lnTo>
+                  <a:lnTo>
+                    <a:pt x="787847" y="15054"/>
+                  </a:lnTo>
+                  <a:lnTo>
+                    <a:pt x="859470" y="16410"/>
+                  </a:lnTo>
+                  <a:lnTo>
+                    <a:pt x="931092" y="17764"/>
+                  </a:lnTo>
+                  <a:lnTo>
+                    <a:pt x="1002715" y="19115"/>
+                  </a:lnTo>
+                  <a:lnTo>
+                    <a:pt x="1074337" y="20465"/>
+                  </a:lnTo>
+                  <a:lnTo>
+                    <a:pt x="1145960" y="21812"/>
+                  </a:lnTo>
+                  <a:lnTo>
+                    <a:pt x="1217582" y="23158"/>
+                  </a:lnTo>
+                  <a:lnTo>
+                    <a:pt x="1289205" y="24501"/>
+                  </a:lnTo>
+                  <a:lnTo>
+                    <a:pt x="1360827" y="25842"/>
+                  </a:lnTo>
+                  <a:lnTo>
+                    <a:pt x="1432450" y="27181"/>
+                  </a:lnTo>
+                  <a:lnTo>
+                    <a:pt x="1504073" y="28518"/>
+                  </a:lnTo>
+                  <a:lnTo>
+                    <a:pt x="1575695" y="29853"/>
+                  </a:lnTo>
+                  <a:lnTo>
+                    <a:pt x="1647318" y="31186"/>
+                  </a:lnTo>
+                  <a:lnTo>
+                    <a:pt x="1718940" y="32517"/>
+                  </a:lnTo>
+                  <a:lnTo>
+                    <a:pt x="1790563" y="33846"/>
+                  </a:lnTo>
+                  <a:lnTo>
+                    <a:pt x="1862185" y="35172"/>
+                  </a:lnTo>
+                  <a:lnTo>
+                    <a:pt x="1933808" y="36497"/>
+                  </a:lnTo>
+                  <a:lnTo>
+                    <a:pt x="2005430" y="37820"/>
+                  </a:lnTo>
+                  <a:lnTo>
+                    <a:pt x="2077053" y="39140"/>
+                  </a:lnTo>
+                  <a:lnTo>
+                    <a:pt x="2148675" y="40459"/>
+                  </a:lnTo>
+                  <a:lnTo>
+                    <a:pt x="2220298" y="41775"/>
+                  </a:lnTo>
+                  <a:lnTo>
+                    <a:pt x="2291920" y="43089"/>
+                  </a:lnTo>
+                  <a:lnTo>
+                    <a:pt x="2363543" y="44402"/>
+                  </a:lnTo>
+                  <a:lnTo>
+                    <a:pt x="2435165" y="45712"/>
+                  </a:lnTo>
+                  <a:lnTo>
+                    <a:pt x="2506788" y="47020"/>
+                  </a:lnTo>
+                  <a:lnTo>
+                    <a:pt x="2578410" y="48326"/>
+                  </a:lnTo>
+                  <a:lnTo>
+                    <a:pt x="2650033" y="49630"/>
+                  </a:lnTo>
+                  <a:lnTo>
+                    <a:pt x="2721655" y="50933"/>
+                  </a:lnTo>
+                  <a:lnTo>
+                    <a:pt x="2793278" y="52233"/>
+                  </a:lnTo>
+                  <a:lnTo>
+                    <a:pt x="2864901" y="53531"/>
+                  </a:lnTo>
+                  <a:lnTo>
+                    <a:pt x="2936523" y="54827"/>
+                  </a:lnTo>
+                  <a:lnTo>
+                    <a:pt x="3008146" y="56121"/>
+                  </a:lnTo>
+                  <a:lnTo>
+                    <a:pt x="3079768" y="57413"/>
+                  </a:lnTo>
+                  <a:lnTo>
+                    <a:pt x="3151391" y="58703"/>
+                  </a:lnTo>
+                  <a:lnTo>
+                    <a:pt x="3223013" y="59991"/>
+                  </a:lnTo>
+                  <a:lnTo>
+                    <a:pt x="3294636" y="61277"/>
+                  </a:lnTo>
+                  <a:lnTo>
+                    <a:pt x="3366258" y="62561"/>
+                  </a:lnTo>
+                  <a:lnTo>
+                    <a:pt x="3437881" y="63843"/>
+                  </a:lnTo>
+                  <a:lnTo>
+                    <a:pt x="3509503" y="65123"/>
+                  </a:lnTo>
+                  <a:lnTo>
+                    <a:pt x="3581126" y="66401"/>
+                  </a:lnTo>
+                  <a:lnTo>
+                    <a:pt x="3652748" y="67677"/>
+                  </a:lnTo>
+                  <a:lnTo>
+                    <a:pt x="3724371" y="68951"/>
+                  </a:lnTo>
+                  <a:lnTo>
+                    <a:pt x="3795993" y="70223"/>
+                  </a:lnTo>
+                  <a:lnTo>
+                    <a:pt x="3867616" y="71494"/>
+                  </a:lnTo>
+                  <a:lnTo>
+                    <a:pt x="3939238" y="72762"/>
+                  </a:lnTo>
+                  <a:lnTo>
+                    <a:pt x="4010861" y="74028"/>
+                  </a:lnTo>
+                  <a:lnTo>
+                    <a:pt x="4082483" y="75292"/>
+                  </a:lnTo>
+                  <a:lnTo>
+                    <a:pt x="4154106" y="76554"/>
+                  </a:lnTo>
+                  <a:lnTo>
+                    <a:pt x="4225729" y="77815"/>
+                  </a:lnTo>
+                  <a:lnTo>
+                    <a:pt x="4297351" y="79073"/>
+                  </a:lnTo>
+                  <a:lnTo>
+                    <a:pt x="4368974" y="80329"/>
+                  </a:lnTo>
+                  <a:lnTo>
+                    <a:pt x="4440596" y="81584"/>
+                  </a:lnTo>
+                  <a:lnTo>
+                    <a:pt x="4512219" y="82836"/>
+                  </a:lnTo>
+                  <a:lnTo>
+                    <a:pt x="4583841" y="84087"/>
+                  </a:lnTo>
+                  <a:lnTo>
+                    <a:pt x="4655464" y="85335"/>
+                  </a:lnTo>
+                  <a:lnTo>
+                    <a:pt x="4727086" y="86582"/>
+                  </a:lnTo>
+                  <a:lnTo>
+                    <a:pt x="4798709" y="87827"/>
+                  </a:lnTo>
+                  <a:lnTo>
+                    <a:pt x="4870331" y="89069"/>
+                  </a:lnTo>
+                  <a:lnTo>
+                    <a:pt x="4941954" y="90310"/>
+                  </a:lnTo>
+                  <a:lnTo>
+                    <a:pt x="5013576" y="91549"/>
+                  </a:lnTo>
+                  <a:lnTo>
+                    <a:pt x="5085199" y="92786"/>
+                  </a:lnTo>
+                  <a:lnTo>
+                    <a:pt x="5156821" y="94021"/>
+                  </a:lnTo>
+                  <a:lnTo>
+                    <a:pt x="5228444" y="95254"/>
+                  </a:lnTo>
+                  <a:lnTo>
+                    <a:pt x="5300066" y="96485"/>
+                  </a:lnTo>
+                  <a:lnTo>
+                    <a:pt x="5371689" y="97715"/>
+                  </a:lnTo>
+                  <a:lnTo>
+                    <a:pt x="5443311" y="98942"/>
+                  </a:lnTo>
+                  <a:lnTo>
+                    <a:pt x="5514934" y="100168"/>
+                  </a:lnTo>
+                  <a:lnTo>
+                    <a:pt x="5586557" y="101391"/>
+                  </a:lnTo>
+                  <a:lnTo>
+                    <a:pt x="5658179" y="102613"/>
+                  </a:lnTo>
+                  <a:lnTo>
+                    <a:pt x="5729802" y="103833"/>
+                  </a:lnTo>
+                  <a:lnTo>
+                    <a:pt x="5801424" y="105051"/>
+                  </a:lnTo>
+                  <a:lnTo>
+                    <a:pt x="5873047" y="106267"/>
+                  </a:lnTo>
+                  <a:lnTo>
+                    <a:pt x="5944669" y="107481"/>
+                  </a:lnTo>
+                  <a:lnTo>
+                    <a:pt x="6016292" y="108693"/>
+                  </a:lnTo>
+                  <a:lnTo>
+                    <a:pt x="6087914" y="109903"/>
+                  </a:lnTo>
+                  <a:lnTo>
+                    <a:pt x="6159537" y="111112"/>
+                  </a:lnTo>
+                  <a:lnTo>
+                    <a:pt x="6231159" y="112318"/>
+                  </a:lnTo>
+                  <a:lnTo>
+                    <a:pt x="6302782" y="113523"/>
+                  </a:lnTo>
+                  <a:lnTo>
+                    <a:pt x="6374404" y="114726"/>
+                  </a:lnTo>
+                  <a:lnTo>
+                    <a:pt x="6446027" y="115927"/>
+                  </a:lnTo>
+                  <a:lnTo>
+                    <a:pt x="6517649" y="117126"/>
+                  </a:lnTo>
+                  <a:lnTo>
+                    <a:pt x="6589272" y="118323"/>
+                  </a:lnTo>
+                  <a:lnTo>
+                    <a:pt x="6660894" y="119518"/>
+                  </a:lnTo>
+                  <a:lnTo>
+                    <a:pt x="6732517" y="120712"/>
+                  </a:lnTo>
+                  <a:lnTo>
+                    <a:pt x="6804139" y="121903"/>
+                  </a:lnTo>
+                  <a:lnTo>
+                    <a:pt x="6875762" y="123093"/>
+                  </a:lnTo>
+                  <a:lnTo>
+                    <a:pt x="6947385" y="124281"/>
+                  </a:lnTo>
+                  <a:lnTo>
+                    <a:pt x="7019007" y="125467"/>
+                  </a:lnTo>
+                  <a:lnTo>
+                    <a:pt x="7090630" y="126652"/>
                   </a:lnTo>
                 </a:path>
               </a:pathLst>
@@ -4573,7 +4573,7 @@
           </p:nvSpPr>
           <p:spPr>
             <a:xfrm>
-              <a:off x="4254372" y="2073503"/>
+              <a:off x="4278722" y="2073503"/>
               <a:ext cx="0" cy="3649639"/>
             </a:xfrm>
             <a:custGeom>
@@ -4846,7 +4846,7 @@
           </p:nvSpPr>
           <p:spPr>
             <a:xfrm>
-              <a:off x="2254916" y="5785772"/>
+              <a:off x="2255364" y="5785772"/>
               <a:ext cx="161574" cy="80101"/>
             </a:xfrm>
             <a:prstGeom prst="rect">
@@ -4892,7 +4892,7 @@
           </p:nvSpPr>
           <p:spPr>
             <a:xfrm>
-              <a:off x="4120281" y="5785772"/>
+              <a:off x="4120286" y="5785772"/>
               <a:ext cx="62179" cy="80101"/>
             </a:xfrm>
             <a:prstGeom prst="rect">
@@ -4938,7 +4938,7 @@
           </p:nvSpPr>
           <p:spPr>
             <a:xfrm>
-              <a:off x="5904858" y="5785772"/>
+              <a:off x="5904422" y="5785772"/>
               <a:ext cx="124358" cy="80101"/>
             </a:xfrm>
             <a:prstGeom prst="rect">
@@ -4984,7 +4984,7 @@
           </p:nvSpPr>
           <p:spPr>
             <a:xfrm>
-              <a:off x="7720525" y="5785772"/>
+              <a:off x="7719647" y="5785772"/>
               <a:ext cx="124358" cy="80101"/>
             </a:xfrm>
             <a:prstGeom prst="rect">
@@ -5155,7 +5155,7 @@
                   <a:latin typeface="Helvetica"/>
                   <a:cs typeface="Helvetica"/>
                 </a:rPr>
-                <a:t>subHR per 10 % decline: 1.02 (0.66-1.59), p = 0.930  |  per IQR decline (Δ = 26.4 %): 1.05 (0.33-3.39)  |  IQR: [-11.1, 15.3] %</a:t>
+                <a:t>subHR per 10 % decline: 1.02 (0.66-1.59), p = 0.930  |  per IQR decline (Δ = 26.4 %): 1.05 (0.33-3.38)  |  IQR: [-11.1, 15.4] %</a:t>
               </a:r>
             </a:p>
           </p:txBody>
